--- a/Treasury-AI Pitch.pptx
+++ b/Treasury-AI Pitch.pptx
@@ -9,16 +9,16 @@
   </p:notesMasterIdLst>
   <p:sldIdLst>
     <p:sldId id="256" r:id="rId2"/>
-    <p:sldId id="257" r:id="rId3"/>
-    <p:sldId id="258" r:id="rId4"/>
-    <p:sldId id="259" r:id="rId5"/>
-    <p:sldId id="260" r:id="rId6"/>
-    <p:sldId id="261" r:id="rId7"/>
-    <p:sldId id="262" r:id="rId8"/>
-    <p:sldId id="263" r:id="rId9"/>
-    <p:sldId id="264" r:id="rId10"/>
-    <p:sldId id="265" r:id="rId11"/>
-    <p:sldId id="266" r:id="rId12"/>
+    <p:sldId id="268" r:id="rId3"/>
+    <p:sldId id="257" r:id="rId4"/>
+    <p:sldId id="258" r:id="rId5"/>
+    <p:sldId id="259" r:id="rId6"/>
+    <p:sldId id="260" r:id="rId7"/>
+    <p:sldId id="261" r:id="rId8"/>
+    <p:sldId id="262" r:id="rId9"/>
+    <p:sldId id="263" r:id="rId10"/>
+    <p:sldId id="264" r:id="rId11"/>
+    <p:sldId id="265" r:id="rId12"/>
     <p:sldId id="267" r:id="rId13"/>
   </p:sldIdLst>
   <p:sldSz cx="12192000" cy="6858000"/>
@@ -589,7 +589,13 @@
   <p:cSld>
     <p:spTree>
       <p:nvGrpSpPr>
-        <p:cNvPr id="1" name=""/>
+        <p:cNvPr id="1" name="">
+          <a:extLst>
+            <a:ext uri="{FF2B5EF4-FFF2-40B4-BE49-F238E27FC236}">
+              <a16:creationId xmlns:a16="http://schemas.microsoft.com/office/drawing/2014/main" id="{AE0C5FF6-CBDD-7940-B8E3-F11F4DE122FD}"/>
+            </a:ext>
+          </a:extLst>
+        </p:cNvPr>
         <p:cNvGrpSpPr/>
         <p:nvPr/>
       </p:nvGrpSpPr>
@@ -603,7 +609,13 @@
       </p:grpSpPr>
       <p:sp>
         <p:nvSpPr>
-          <p:cNvPr id="2" name="Slide Image Placeholder 1"/>
+          <p:cNvPr id="2" name="Slide Image Placeholder 1">
+            <a:extLst>
+              <a:ext uri="{FF2B5EF4-FFF2-40B4-BE49-F238E27FC236}">
+                <a16:creationId xmlns:a16="http://schemas.microsoft.com/office/drawing/2014/main" id="{75CDC299-BE1F-D001-94F1-1E2C01C03561}"/>
+              </a:ext>
+            </a:extLst>
+          </p:cNvPr>
           <p:cNvSpPr>
             <a:spLocks noGrp="1" noRot="1" noChangeAspect="1"/>
           </p:cNvSpPr>
@@ -615,7 +627,13 @@
       </p:sp>
       <p:sp>
         <p:nvSpPr>
-          <p:cNvPr id="3" name="Notes Placeholder 2"/>
+          <p:cNvPr id="3" name="Notes Placeholder 2">
+            <a:extLst>
+              <a:ext uri="{FF2B5EF4-FFF2-40B4-BE49-F238E27FC236}">
+                <a16:creationId xmlns:a16="http://schemas.microsoft.com/office/drawing/2014/main" id="{76E07F6A-6490-4E99-9867-FEC3D97528B2}"/>
+              </a:ext>
+            </a:extLst>
+          </p:cNvPr>
           <p:cNvSpPr>
             <a:spLocks noGrp="1"/>
           </p:cNvSpPr>
@@ -634,7 +652,13 @@
       </p:sp>
       <p:sp>
         <p:nvSpPr>
-          <p:cNvPr id="4" name="Slide Number Placeholder 3"/>
+          <p:cNvPr id="4" name="Slide Number Placeholder 3">
+            <a:extLst>
+              <a:ext uri="{FF2B5EF4-FFF2-40B4-BE49-F238E27FC236}">
+                <a16:creationId xmlns:a16="http://schemas.microsoft.com/office/drawing/2014/main" id="{14DEC3E8-BB28-42A6-BA2F-9F8729A31A94}"/>
+              </a:ext>
+            </a:extLst>
+          </p:cNvPr>
           <p:cNvSpPr>
             <a:spLocks noGrp="1"/>
           </p:cNvSpPr>
@@ -658,7 +682,7 @@
     </p:spTree>
     <p:extLst>
       <p:ext uri="{BB962C8B-B14F-4D97-AF65-F5344CB8AC3E}">
-        <p14:creationId xmlns:p14="http://schemas.microsoft.com/office/powerpoint/2010/main" val="1024086991"/>
+        <p14:creationId xmlns:p14="http://schemas.microsoft.com/office/powerpoint/2010/main" val="3098956873"/>
       </p:ext>
     </p:extLst>
   </p:cSld>
@@ -1900,6 +1924,1362 @@
 
 <file path=ppt/slides/slide10.xml><?xml version="1.0" encoding="utf-8"?>
 <p:sld xmlns:a="http://schemas.openxmlformats.org/drawingml/2006/main" xmlns:r="http://schemas.openxmlformats.org/officeDocument/2006/relationships" xmlns:p="http://schemas.openxmlformats.org/presentationml/2006/main">
+  <p:cSld name="Slide 9">
+    <p:bg>
+      <p:bgPr>
+        <a:solidFill>
+          <a:srgbClr val="070B14"/>
+        </a:solidFill>
+        <a:effectLst/>
+      </p:bgPr>
+    </p:bg>
+    <p:spTree>
+      <p:nvGrpSpPr>
+        <p:cNvPr id="1" name=""/>
+        <p:cNvGrpSpPr/>
+        <p:nvPr/>
+      </p:nvGrpSpPr>
+      <p:grpSpPr>
+        <a:xfrm>
+          <a:off x="0" y="0"/>
+          <a:ext cx="0" cy="0"/>
+          <a:chOff x="0" y="0"/>
+          <a:chExt cx="0" cy="0"/>
+        </a:xfrm>
+      </p:grpSpPr>
+      <p:sp>
+        <p:nvSpPr>
+          <p:cNvPr id="2" name="Text 0"/>
+          <p:cNvSpPr/>
+          <p:nvPr/>
+        </p:nvSpPr>
+        <p:spPr>
+          <a:xfrm>
+            <a:off x="841248" y="566928"/>
+            <a:ext cx="7315200" cy="274320"/>
+          </a:xfrm>
+          <a:prstGeom prst="rect">
+            <a:avLst/>
+          </a:prstGeom>
+          <a:noFill/>
+          <a:ln/>
+        </p:spPr>
+        <p:txBody>
+          <a:bodyPr wrap="square" lIns="0" tIns="0" rIns="0" bIns="0" rtlCol="0" anchor="ctr"/>
+          <a:lstStyle/>
+          <a:p>
+            <a:pPr marL="0" indent="0">
+              <a:buNone/>
+            </a:pPr>
+            <a:r>
+              <a:rPr lang="en-US" sz="1100" b="1" kern="0" spc="300" dirty="0">
+                <a:solidFill>
+                  <a:srgbClr val="5B95FF"/>
+                </a:solidFill>
+                <a:latin typeface="Calibri" pitchFamily="34" charset="0"/>
+                <a:ea typeface="Calibri" pitchFamily="34" charset="-122"/>
+                <a:cs typeface="Calibri" pitchFamily="34" charset="-120"/>
+              </a:rPr>
+              <a:t>FRAUD DETECTION &amp; REPORTING</a:t>
+            </a:r>
+            <a:endParaRPr lang="en-US" sz="1100" dirty="0"/>
+          </a:p>
+        </p:txBody>
+      </p:sp>
+      <p:sp>
+        <p:nvSpPr>
+          <p:cNvPr id="3" name="Text 1"/>
+          <p:cNvSpPr/>
+          <p:nvPr/>
+        </p:nvSpPr>
+        <p:spPr>
+          <a:xfrm>
+            <a:off x="822960" y="868680"/>
+            <a:ext cx="10698480" cy="777240"/>
+          </a:xfrm>
+          <a:prstGeom prst="rect">
+            <a:avLst/>
+          </a:prstGeom>
+          <a:noFill/>
+          <a:ln/>
+        </p:spPr>
+        <p:txBody>
+          <a:bodyPr wrap="square" lIns="0" tIns="0" rIns="0" bIns="0" rtlCol="0" anchor="ctr"/>
+          <a:lstStyle/>
+          <a:p>
+            <a:pPr marL="0" indent="0">
+              <a:buNone/>
+            </a:pPr>
+            <a:r>
+              <a:rPr lang="en-US" sz="3000" b="1" dirty="0">
+                <a:solidFill>
+                  <a:srgbClr val="F3F6FC"/>
+                </a:solidFill>
+                <a:latin typeface="Georgia" pitchFamily="34" charset="0"/>
+                <a:ea typeface="Georgia" pitchFamily="34" charset="-122"/>
+                <a:cs typeface="Georgia" pitchFamily="34" charset="-120"/>
+              </a:rPr>
+              <a:t>Catches risk, proves the trail.</a:t>
+            </a:r>
+            <a:endParaRPr lang="en-US" sz="3000" dirty="0"/>
+          </a:p>
+        </p:txBody>
+      </p:sp>
+      <p:sp>
+        <p:nvSpPr>
+          <p:cNvPr id="4" name="Shape 2"/>
+          <p:cNvSpPr/>
+          <p:nvPr/>
+        </p:nvSpPr>
+        <p:spPr>
+          <a:xfrm>
+            <a:off x="841248" y="1828800"/>
+            <a:ext cx="5120640" cy="4023360"/>
+          </a:xfrm>
+          <a:prstGeom prst="roundRect">
+            <a:avLst>
+              <a:gd name="adj" fmla="val 1818"/>
+            </a:avLst>
+          </a:prstGeom>
+          <a:solidFill>
+            <a:srgbClr val="101A30"/>
+          </a:solidFill>
+          <a:ln w="12700">
+            <a:solidFill>
+              <a:srgbClr val="243150"/>
+            </a:solidFill>
+            <a:prstDash val="solid"/>
+          </a:ln>
+        </p:spPr>
+        <p:txBody>
+          <a:bodyPr/>
+          <a:lstStyle/>
+          <a:p>
+            <a:endParaRPr lang="en-MY"/>
+          </a:p>
+        </p:txBody>
+      </p:sp>
+      <p:sp>
+        <p:nvSpPr>
+          <p:cNvPr id="5" name="Text 3"/>
+          <p:cNvSpPr/>
+          <p:nvPr/>
+        </p:nvSpPr>
+        <p:spPr>
+          <a:xfrm>
+            <a:off x="1097280" y="2057400"/>
+            <a:ext cx="4572000" cy="274320"/>
+          </a:xfrm>
+          <a:prstGeom prst="rect">
+            <a:avLst/>
+          </a:prstGeom>
+          <a:noFill/>
+          <a:ln/>
+        </p:spPr>
+        <p:txBody>
+          <a:bodyPr wrap="square" lIns="0" tIns="0" rIns="0" bIns="0" rtlCol="0" anchor="ctr"/>
+          <a:lstStyle/>
+          <a:p>
+            <a:pPr marL="0" indent="0">
+              <a:buNone/>
+            </a:pPr>
+            <a:r>
+              <a:rPr lang="en-US" sz="1100" b="1" kern="0" spc="200" dirty="0">
+                <a:solidFill>
+                  <a:srgbClr val="E5823C"/>
+                </a:solidFill>
+                <a:latin typeface="Calibri" pitchFamily="34" charset="0"/>
+                <a:ea typeface="Calibri" pitchFamily="34" charset="-122"/>
+                <a:cs typeface="Calibri" pitchFamily="34" charset="-120"/>
+              </a:rPr>
+              <a:t>RULE-BASED FRAUD ENGINE</a:t>
+            </a:r>
+            <a:endParaRPr lang="en-US" sz="1100" dirty="0"/>
+          </a:p>
+        </p:txBody>
+      </p:sp>
+      <p:sp>
+        <p:nvSpPr>
+          <p:cNvPr id="6" name="Shape 4"/>
+          <p:cNvSpPr/>
+          <p:nvPr/>
+        </p:nvSpPr>
+        <p:spPr>
+          <a:xfrm>
+            <a:off x="1143000" y="2505456"/>
+            <a:ext cx="237744" cy="237744"/>
+          </a:xfrm>
+          <a:prstGeom prst="ellipse">
+            <a:avLst/>
+          </a:prstGeom>
+          <a:solidFill>
+            <a:srgbClr val="E5823C"/>
+          </a:solidFill>
+          <a:ln w="12700">
+            <a:solidFill>
+              <a:srgbClr val="E5823C"/>
+            </a:solidFill>
+            <a:prstDash val="solid"/>
+          </a:ln>
+        </p:spPr>
+        <p:txBody>
+          <a:bodyPr/>
+          <a:lstStyle/>
+          <a:p>
+            <a:endParaRPr lang="en-MY"/>
+          </a:p>
+        </p:txBody>
+      </p:sp>
+      <p:sp>
+        <p:nvSpPr>
+          <p:cNvPr id="7" name="Text 5"/>
+          <p:cNvSpPr/>
+          <p:nvPr/>
+        </p:nvSpPr>
+        <p:spPr>
+          <a:xfrm>
+            <a:off x="1508760" y="2414016"/>
+            <a:ext cx="4297680" cy="310896"/>
+          </a:xfrm>
+          <a:prstGeom prst="rect">
+            <a:avLst/>
+          </a:prstGeom>
+          <a:noFill/>
+          <a:ln/>
+        </p:spPr>
+        <p:txBody>
+          <a:bodyPr wrap="square" lIns="0" tIns="0" rIns="0" bIns="0" rtlCol="0" anchor="ctr"/>
+          <a:lstStyle/>
+          <a:p>
+            <a:pPr marL="0" indent="0">
+              <a:buNone/>
+            </a:pPr>
+            <a:r>
+              <a:rPr lang="en-US" sz="1300" b="1" dirty="0">
+                <a:solidFill>
+                  <a:srgbClr val="F3F6FC"/>
+                </a:solidFill>
+                <a:latin typeface="Calibri" pitchFamily="34" charset="0"/>
+                <a:ea typeface="Calibri" pitchFamily="34" charset="-122"/>
+                <a:cs typeface="Calibri" pitchFamily="34" charset="-120"/>
+              </a:rPr>
+              <a:t>Duplicate invoices</a:t>
+            </a:r>
+            <a:endParaRPr lang="en-US" sz="1300" dirty="0"/>
+          </a:p>
+        </p:txBody>
+      </p:sp>
+      <p:sp>
+        <p:nvSpPr>
+          <p:cNvPr id="8" name="Text 6"/>
+          <p:cNvSpPr/>
+          <p:nvPr/>
+        </p:nvSpPr>
+        <p:spPr>
+          <a:xfrm>
+            <a:off x="1508760" y="2706624"/>
+            <a:ext cx="4206240" cy="310896"/>
+          </a:xfrm>
+          <a:prstGeom prst="rect">
+            <a:avLst/>
+          </a:prstGeom>
+          <a:noFill/>
+          <a:ln/>
+        </p:spPr>
+        <p:txBody>
+          <a:bodyPr wrap="square" lIns="0" tIns="0" rIns="0" bIns="0" rtlCol="0" anchor="ctr"/>
+          <a:lstStyle/>
+          <a:p>
+            <a:pPr marL="0" indent="0">
+              <a:buNone/>
+            </a:pPr>
+            <a:r>
+              <a:rPr lang="en-US" sz="1050" dirty="0">
+                <a:solidFill>
+                  <a:srgbClr val="6A7795"/>
+                </a:solidFill>
+                <a:latin typeface="Calibri" pitchFamily="34" charset="0"/>
+                <a:ea typeface="Calibri" pitchFamily="34" charset="-122"/>
+                <a:cs typeface="Calibri" pitchFamily="34" charset="-120"/>
+              </a:rPr>
+              <a:t>Same vendor, amount and reference billed twice.</a:t>
+            </a:r>
+            <a:endParaRPr lang="en-US" sz="1050" dirty="0"/>
+          </a:p>
+        </p:txBody>
+      </p:sp>
+      <p:sp>
+        <p:nvSpPr>
+          <p:cNvPr id="9" name="Shape 7"/>
+          <p:cNvSpPr/>
+          <p:nvPr/>
+        </p:nvSpPr>
+        <p:spPr>
+          <a:xfrm>
+            <a:off x="1143000" y="3163824"/>
+            <a:ext cx="237744" cy="237744"/>
+          </a:xfrm>
+          <a:prstGeom prst="ellipse">
+            <a:avLst/>
+          </a:prstGeom>
+          <a:solidFill>
+            <a:srgbClr val="E5823C"/>
+          </a:solidFill>
+          <a:ln w="12700">
+            <a:solidFill>
+              <a:srgbClr val="E5823C"/>
+            </a:solidFill>
+            <a:prstDash val="solid"/>
+          </a:ln>
+        </p:spPr>
+        <p:txBody>
+          <a:bodyPr/>
+          <a:lstStyle/>
+          <a:p>
+            <a:endParaRPr lang="en-MY"/>
+          </a:p>
+        </p:txBody>
+      </p:sp>
+      <p:sp>
+        <p:nvSpPr>
+          <p:cNvPr id="10" name="Text 8"/>
+          <p:cNvSpPr/>
+          <p:nvPr/>
+        </p:nvSpPr>
+        <p:spPr>
+          <a:xfrm>
+            <a:off x="1508760" y="3072384"/>
+            <a:ext cx="4297680" cy="310896"/>
+          </a:xfrm>
+          <a:prstGeom prst="rect">
+            <a:avLst/>
+          </a:prstGeom>
+          <a:noFill/>
+          <a:ln/>
+        </p:spPr>
+        <p:txBody>
+          <a:bodyPr wrap="square" lIns="0" tIns="0" rIns="0" bIns="0" rtlCol="0" anchor="ctr"/>
+          <a:lstStyle/>
+          <a:p>
+            <a:pPr marL="0" indent="0">
+              <a:buNone/>
+            </a:pPr>
+            <a:r>
+              <a:rPr lang="en-US" sz="1300" b="1" dirty="0">
+                <a:solidFill>
+                  <a:srgbClr val="F3F6FC"/>
+                </a:solidFill>
+                <a:latin typeface="Calibri" pitchFamily="34" charset="0"/>
+                <a:ea typeface="Calibri" pitchFamily="34" charset="-122"/>
+                <a:cs typeface="Calibri" pitchFamily="34" charset="-120"/>
+              </a:rPr>
+              <a:t>Unknown merchants</a:t>
+            </a:r>
+            <a:endParaRPr lang="en-US" sz="1300" dirty="0"/>
+          </a:p>
+        </p:txBody>
+      </p:sp>
+      <p:sp>
+        <p:nvSpPr>
+          <p:cNvPr id="11" name="Text 9"/>
+          <p:cNvSpPr/>
+          <p:nvPr/>
+        </p:nvSpPr>
+        <p:spPr>
+          <a:xfrm>
+            <a:off x="1508760" y="3364992"/>
+            <a:ext cx="4206240" cy="310896"/>
+          </a:xfrm>
+          <a:prstGeom prst="rect">
+            <a:avLst/>
+          </a:prstGeom>
+          <a:noFill/>
+          <a:ln/>
+        </p:spPr>
+        <p:txBody>
+          <a:bodyPr wrap="square" lIns="0" tIns="0" rIns="0" bIns="0" rtlCol="0" anchor="ctr"/>
+          <a:lstStyle/>
+          <a:p>
+            <a:pPr marL="0" indent="0">
+              <a:buNone/>
+            </a:pPr>
+            <a:r>
+              <a:rPr lang="en-US" sz="1050" dirty="0">
+                <a:solidFill>
+                  <a:srgbClr val="6A7795"/>
+                </a:solidFill>
+                <a:latin typeface="Calibri" pitchFamily="34" charset="0"/>
+                <a:ea typeface="Calibri" pitchFamily="34" charset="-122"/>
+                <a:cs typeface="Calibri" pitchFamily="34" charset="-120"/>
+              </a:rPr>
+              <a:t>Outgoing payments with no matching invoice.</a:t>
+            </a:r>
+            <a:endParaRPr lang="en-US" sz="1050" dirty="0"/>
+          </a:p>
+        </p:txBody>
+      </p:sp>
+      <p:sp>
+        <p:nvSpPr>
+          <p:cNvPr id="12" name="Shape 10"/>
+          <p:cNvSpPr/>
+          <p:nvPr/>
+        </p:nvSpPr>
+        <p:spPr>
+          <a:xfrm>
+            <a:off x="1143000" y="3822192"/>
+            <a:ext cx="237744" cy="237744"/>
+          </a:xfrm>
+          <a:prstGeom prst="ellipse">
+            <a:avLst/>
+          </a:prstGeom>
+          <a:solidFill>
+            <a:srgbClr val="E5823C"/>
+          </a:solidFill>
+          <a:ln w="12700">
+            <a:solidFill>
+              <a:srgbClr val="E5823C"/>
+            </a:solidFill>
+            <a:prstDash val="solid"/>
+          </a:ln>
+        </p:spPr>
+        <p:txBody>
+          <a:bodyPr/>
+          <a:lstStyle/>
+          <a:p>
+            <a:endParaRPr lang="en-MY"/>
+          </a:p>
+        </p:txBody>
+      </p:sp>
+      <p:sp>
+        <p:nvSpPr>
+          <p:cNvPr id="13" name="Text 11"/>
+          <p:cNvSpPr/>
+          <p:nvPr/>
+        </p:nvSpPr>
+        <p:spPr>
+          <a:xfrm>
+            <a:off x="1508760" y="3730752"/>
+            <a:ext cx="4297680" cy="310896"/>
+          </a:xfrm>
+          <a:prstGeom prst="rect">
+            <a:avLst/>
+          </a:prstGeom>
+          <a:noFill/>
+          <a:ln/>
+        </p:spPr>
+        <p:txBody>
+          <a:bodyPr wrap="square" lIns="0" tIns="0" rIns="0" bIns="0" rtlCol="0" anchor="ctr"/>
+          <a:lstStyle/>
+          <a:p>
+            <a:pPr marL="0" indent="0">
+              <a:buNone/>
+            </a:pPr>
+            <a:r>
+              <a:rPr lang="en-US" sz="1300" b="1" dirty="0">
+                <a:solidFill>
+                  <a:srgbClr val="F3F6FC"/>
+                </a:solidFill>
+                <a:latin typeface="Calibri" pitchFamily="34" charset="0"/>
+                <a:ea typeface="Calibri" pitchFamily="34" charset="-122"/>
+                <a:cs typeface="Calibri" pitchFamily="34" charset="-120"/>
+              </a:rPr>
+              <a:t>Missing references</a:t>
+            </a:r>
+            <a:endParaRPr lang="en-US" sz="1300" dirty="0"/>
+          </a:p>
+        </p:txBody>
+      </p:sp>
+      <p:sp>
+        <p:nvSpPr>
+          <p:cNvPr id="14" name="Text 12"/>
+          <p:cNvSpPr/>
+          <p:nvPr/>
+        </p:nvSpPr>
+        <p:spPr>
+          <a:xfrm>
+            <a:off x="1508760" y="4023360"/>
+            <a:ext cx="4206240" cy="310896"/>
+          </a:xfrm>
+          <a:prstGeom prst="rect">
+            <a:avLst/>
+          </a:prstGeom>
+          <a:noFill/>
+          <a:ln/>
+        </p:spPr>
+        <p:txBody>
+          <a:bodyPr wrap="square" lIns="0" tIns="0" rIns="0" bIns="0" rtlCol="0" anchor="ctr"/>
+          <a:lstStyle/>
+          <a:p>
+            <a:pPr marL="0" indent="0">
+              <a:buNone/>
+            </a:pPr>
+            <a:r>
+              <a:rPr lang="en-US" sz="1050" dirty="0">
+                <a:solidFill>
+                  <a:srgbClr val="6A7795"/>
+                </a:solidFill>
+                <a:latin typeface="Calibri" pitchFamily="34" charset="0"/>
+                <a:ea typeface="Calibri" pitchFamily="34" charset="-122"/>
+                <a:cs typeface="Calibri" pitchFamily="34" charset="-120"/>
+              </a:rPr>
+              <a:t>Large payments with a weak audit trail.</a:t>
+            </a:r>
+            <a:endParaRPr lang="en-US" sz="1050" dirty="0"/>
+          </a:p>
+        </p:txBody>
+      </p:sp>
+      <p:sp>
+        <p:nvSpPr>
+          <p:cNvPr id="15" name="Shape 13"/>
+          <p:cNvSpPr/>
+          <p:nvPr/>
+        </p:nvSpPr>
+        <p:spPr>
+          <a:xfrm>
+            <a:off x="1143000" y="4480560"/>
+            <a:ext cx="237744" cy="237744"/>
+          </a:xfrm>
+          <a:prstGeom prst="ellipse">
+            <a:avLst/>
+          </a:prstGeom>
+          <a:solidFill>
+            <a:srgbClr val="E5823C"/>
+          </a:solidFill>
+          <a:ln w="12700">
+            <a:solidFill>
+              <a:srgbClr val="E5823C"/>
+            </a:solidFill>
+            <a:prstDash val="solid"/>
+          </a:ln>
+        </p:spPr>
+        <p:txBody>
+          <a:bodyPr/>
+          <a:lstStyle/>
+          <a:p>
+            <a:endParaRPr lang="en-MY"/>
+          </a:p>
+        </p:txBody>
+      </p:sp>
+      <p:sp>
+        <p:nvSpPr>
+          <p:cNvPr id="16" name="Text 14"/>
+          <p:cNvSpPr/>
+          <p:nvPr/>
+        </p:nvSpPr>
+        <p:spPr>
+          <a:xfrm>
+            <a:off x="1508760" y="4389120"/>
+            <a:ext cx="4297680" cy="310896"/>
+          </a:xfrm>
+          <a:prstGeom prst="rect">
+            <a:avLst/>
+          </a:prstGeom>
+          <a:noFill/>
+          <a:ln/>
+        </p:spPr>
+        <p:txBody>
+          <a:bodyPr wrap="square" lIns="0" tIns="0" rIns="0" bIns="0" rtlCol="0" anchor="ctr"/>
+          <a:lstStyle/>
+          <a:p>
+            <a:pPr marL="0" indent="0">
+              <a:buNone/>
+            </a:pPr>
+            <a:r>
+              <a:rPr lang="en-US" sz="1300" b="1" dirty="0">
+                <a:solidFill>
+                  <a:srgbClr val="F3F6FC"/>
+                </a:solidFill>
+                <a:latin typeface="Calibri" pitchFamily="34" charset="0"/>
+                <a:ea typeface="Calibri" pitchFamily="34" charset="-122"/>
+                <a:cs typeface="Calibri" pitchFamily="34" charset="-120"/>
+              </a:rPr>
+              <a:t>Abnormal amounts</a:t>
+            </a:r>
+            <a:endParaRPr lang="en-US" sz="1300" dirty="0"/>
+          </a:p>
+        </p:txBody>
+      </p:sp>
+      <p:sp>
+        <p:nvSpPr>
+          <p:cNvPr id="17" name="Text 15"/>
+          <p:cNvSpPr/>
+          <p:nvPr/>
+        </p:nvSpPr>
+        <p:spPr>
+          <a:xfrm>
+            <a:off x="1508760" y="4681728"/>
+            <a:ext cx="4206240" cy="310896"/>
+          </a:xfrm>
+          <a:prstGeom prst="rect">
+            <a:avLst/>
+          </a:prstGeom>
+          <a:noFill/>
+          <a:ln/>
+        </p:spPr>
+        <p:txBody>
+          <a:bodyPr wrap="square" lIns="0" tIns="0" rIns="0" bIns="0" rtlCol="0" anchor="ctr"/>
+          <a:lstStyle/>
+          <a:p>
+            <a:pPr marL="0" indent="0">
+              <a:buNone/>
+            </a:pPr>
+            <a:r>
+              <a:rPr lang="en-US" sz="1050" dirty="0">
+                <a:solidFill>
+                  <a:srgbClr val="6A7795"/>
+                </a:solidFill>
+                <a:latin typeface="Calibri" pitchFamily="34" charset="0"/>
+                <a:ea typeface="Calibri" pitchFamily="34" charset="-122"/>
+                <a:cs typeface="Calibri" pitchFamily="34" charset="-120"/>
+              </a:rPr>
+              <a:t>Statistical outliers far above the batch norm.</a:t>
+            </a:r>
+            <a:endParaRPr lang="en-US" sz="1050" dirty="0"/>
+          </a:p>
+        </p:txBody>
+      </p:sp>
+      <p:sp>
+        <p:nvSpPr>
+          <p:cNvPr id="18" name="Shape 16"/>
+          <p:cNvSpPr/>
+          <p:nvPr/>
+        </p:nvSpPr>
+        <p:spPr>
+          <a:xfrm>
+            <a:off x="1143000" y="5138928"/>
+            <a:ext cx="237744" cy="237744"/>
+          </a:xfrm>
+          <a:prstGeom prst="ellipse">
+            <a:avLst/>
+          </a:prstGeom>
+          <a:solidFill>
+            <a:srgbClr val="E5823C"/>
+          </a:solidFill>
+          <a:ln w="12700">
+            <a:solidFill>
+              <a:srgbClr val="E5823C"/>
+            </a:solidFill>
+            <a:prstDash val="solid"/>
+          </a:ln>
+        </p:spPr>
+        <p:txBody>
+          <a:bodyPr/>
+          <a:lstStyle/>
+          <a:p>
+            <a:endParaRPr lang="en-MY"/>
+          </a:p>
+        </p:txBody>
+      </p:sp>
+      <p:sp>
+        <p:nvSpPr>
+          <p:cNvPr id="19" name="Text 17"/>
+          <p:cNvSpPr/>
+          <p:nvPr/>
+        </p:nvSpPr>
+        <p:spPr>
+          <a:xfrm>
+            <a:off x="1508760" y="5047488"/>
+            <a:ext cx="4297680" cy="310896"/>
+          </a:xfrm>
+          <a:prstGeom prst="rect">
+            <a:avLst/>
+          </a:prstGeom>
+          <a:noFill/>
+          <a:ln/>
+        </p:spPr>
+        <p:txBody>
+          <a:bodyPr wrap="square" lIns="0" tIns="0" rIns="0" bIns="0" rtlCol="0" anchor="ctr"/>
+          <a:lstStyle/>
+          <a:p>
+            <a:pPr marL="0" indent="0">
+              <a:buNone/>
+            </a:pPr>
+            <a:r>
+              <a:rPr lang="en-US" sz="1300" b="1" dirty="0">
+                <a:solidFill>
+                  <a:srgbClr val="F3F6FC"/>
+                </a:solidFill>
+                <a:latin typeface="Calibri" pitchFamily="34" charset="0"/>
+                <a:ea typeface="Calibri" pitchFamily="34" charset="-122"/>
+                <a:cs typeface="Calibri" pitchFamily="34" charset="-120"/>
+              </a:rPr>
+              <a:t>Suspicious patterns</a:t>
+            </a:r>
+            <a:endParaRPr lang="en-US" sz="1300" dirty="0"/>
+          </a:p>
+        </p:txBody>
+      </p:sp>
+      <p:sp>
+        <p:nvSpPr>
+          <p:cNvPr id="20" name="Text 18"/>
+          <p:cNvSpPr/>
+          <p:nvPr/>
+        </p:nvSpPr>
+        <p:spPr>
+          <a:xfrm>
+            <a:off x="1508760" y="5340096"/>
+            <a:ext cx="4206240" cy="310896"/>
+          </a:xfrm>
+          <a:prstGeom prst="rect">
+            <a:avLst/>
+          </a:prstGeom>
+          <a:noFill/>
+          <a:ln/>
+        </p:spPr>
+        <p:txBody>
+          <a:bodyPr wrap="square" lIns="0" tIns="0" rIns="0" bIns="0" rtlCol="0" anchor="ctr"/>
+          <a:lstStyle/>
+          <a:p>
+            <a:pPr marL="0" indent="0">
+              <a:buNone/>
+            </a:pPr>
+            <a:r>
+              <a:rPr lang="en-US" sz="1050" dirty="0">
+                <a:solidFill>
+                  <a:srgbClr val="6A7795"/>
+                </a:solidFill>
+                <a:latin typeface="Calibri" pitchFamily="34" charset="0"/>
+                <a:ea typeface="Calibri" pitchFamily="34" charset="-122"/>
+                <a:cs typeface="Calibri" pitchFamily="34" charset="-120"/>
+              </a:rPr>
+              <a:t>Round-number transfers and vendor anomalies.</a:t>
+            </a:r>
+            <a:endParaRPr lang="en-US" sz="1050" dirty="0"/>
+          </a:p>
+        </p:txBody>
+      </p:sp>
+      <p:sp>
+        <p:nvSpPr>
+          <p:cNvPr id="21" name="Shape 19"/>
+          <p:cNvSpPr/>
+          <p:nvPr/>
+        </p:nvSpPr>
+        <p:spPr>
+          <a:xfrm>
+            <a:off x="6199632" y="1828800"/>
+            <a:ext cx="5120640" cy="4023360"/>
+          </a:xfrm>
+          <a:prstGeom prst="roundRect">
+            <a:avLst>
+              <a:gd name="adj" fmla="val 1818"/>
+            </a:avLst>
+          </a:prstGeom>
+          <a:solidFill>
+            <a:srgbClr val="101A30"/>
+          </a:solidFill>
+          <a:ln w="12700">
+            <a:solidFill>
+              <a:srgbClr val="243150"/>
+            </a:solidFill>
+            <a:prstDash val="solid"/>
+          </a:ln>
+        </p:spPr>
+        <p:txBody>
+          <a:bodyPr/>
+          <a:lstStyle/>
+          <a:p>
+            <a:endParaRPr lang="en-MY"/>
+          </a:p>
+        </p:txBody>
+      </p:sp>
+      <p:sp>
+        <p:nvSpPr>
+          <p:cNvPr id="22" name="Text 20"/>
+          <p:cNvSpPr/>
+          <p:nvPr/>
+        </p:nvSpPr>
+        <p:spPr>
+          <a:xfrm>
+            <a:off x="6455664" y="2057400"/>
+            <a:ext cx="4572000" cy="274320"/>
+          </a:xfrm>
+          <a:prstGeom prst="rect">
+            <a:avLst/>
+          </a:prstGeom>
+          <a:noFill/>
+          <a:ln/>
+        </p:spPr>
+        <p:txBody>
+          <a:bodyPr wrap="square" lIns="0" tIns="0" rIns="0" bIns="0" rtlCol="0" anchor="ctr"/>
+          <a:lstStyle/>
+          <a:p>
+            <a:pPr marL="0" indent="0">
+              <a:buNone/>
+            </a:pPr>
+            <a:r>
+              <a:rPr lang="en-US" sz="1100" b="1" kern="0" spc="200" dirty="0">
+                <a:solidFill>
+                  <a:srgbClr val="35C98A"/>
+                </a:solidFill>
+                <a:latin typeface="Calibri" pitchFamily="34" charset="0"/>
+                <a:ea typeface="Calibri" pitchFamily="34" charset="-122"/>
+                <a:cs typeface="Calibri" pitchFamily="34" charset="-120"/>
+              </a:rPr>
+              <a:t>ONE-CLICK AUDIT REPORT</a:t>
+            </a:r>
+            <a:endParaRPr lang="en-US" sz="1100" dirty="0"/>
+          </a:p>
+        </p:txBody>
+      </p:sp>
+      <p:sp>
+        <p:nvSpPr>
+          <p:cNvPr id="23" name="Text 21"/>
+          <p:cNvSpPr/>
+          <p:nvPr/>
+        </p:nvSpPr>
+        <p:spPr>
+          <a:xfrm>
+            <a:off x="6455664" y="2377440"/>
+            <a:ext cx="4572000" cy="640080"/>
+          </a:xfrm>
+          <a:prstGeom prst="rect">
+            <a:avLst/>
+          </a:prstGeom>
+          <a:noFill/>
+          <a:ln/>
+        </p:spPr>
+        <p:txBody>
+          <a:bodyPr wrap="square" lIns="0" tIns="0" rIns="0" bIns="0" rtlCol="0" anchor="ctr"/>
+          <a:lstStyle/>
+          <a:p>
+            <a:pPr marL="0" indent="0">
+              <a:lnSpc>
+                <a:spcPts val="1700"/>
+              </a:lnSpc>
+              <a:buNone/>
+            </a:pPr>
+            <a:r>
+              <a:rPr lang="en-US" sz="1250" dirty="0">
+                <a:solidFill>
+                  <a:srgbClr val="C2CDE0"/>
+                </a:solidFill>
+                <a:latin typeface="Calibri" pitchFamily="34" charset="0"/>
+                <a:ea typeface="Calibri" pitchFamily="34" charset="-122"/>
+                <a:cs typeface="Calibri" pitchFamily="34" charset="-120"/>
+              </a:rPr>
+              <a:t>Every scan exports a professional PDF audit report, ready to hand to an accountant or auditor.</a:t>
+            </a:r>
+            <a:endParaRPr lang="en-US" sz="1250" dirty="0"/>
+          </a:p>
+        </p:txBody>
+      </p:sp>
+      <p:sp>
+        <p:nvSpPr>
+          <p:cNvPr id="24" name="Text 22"/>
+          <p:cNvSpPr/>
+          <p:nvPr/>
+        </p:nvSpPr>
+        <p:spPr>
+          <a:xfrm>
+            <a:off x="6455664" y="3200400"/>
+            <a:ext cx="320040" cy="310896"/>
+          </a:xfrm>
+          <a:prstGeom prst="rect">
+            <a:avLst/>
+          </a:prstGeom>
+          <a:noFill/>
+          <a:ln/>
+        </p:spPr>
+        <p:txBody>
+          <a:bodyPr wrap="square" lIns="0" tIns="0" rIns="0" bIns="0" rtlCol="0" anchor="ctr"/>
+          <a:lstStyle/>
+          <a:p>
+            <a:pPr marL="0" indent="0">
+              <a:buNone/>
+            </a:pPr>
+            <a:r>
+              <a:rPr lang="en-US" sz="1300" b="1" dirty="0">
+                <a:solidFill>
+                  <a:srgbClr val="35C98A"/>
+                </a:solidFill>
+                <a:latin typeface="Calibri" pitchFamily="34" charset="0"/>
+                <a:ea typeface="Calibri" pitchFamily="34" charset="-122"/>
+                <a:cs typeface="Calibri" pitchFamily="34" charset="-120"/>
+              </a:rPr>
+              <a:t>✓</a:t>
+            </a:r>
+            <a:endParaRPr lang="en-US" sz="1300" dirty="0"/>
+          </a:p>
+        </p:txBody>
+      </p:sp>
+      <p:sp>
+        <p:nvSpPr>
+          <p:cNvPr id="25" name="Text 23"/>
+          <p:cNvSpPr/>
+          <p:nvPr/>
+        </p:nvSpPr>
+        <p:spPr>
+          <a:xfrm>
+            <a:off x="6784848" y="3200400"/>
+            <a:ext cx="4297680" cy="310896"/>
+          </a:xfrm>
+          <a:prstGeom prst="rect">
+            <a:avLst/>
+          </a:prstGeom>
+          <a:noFill/>
+          <a:ln/>
+        </p:spPr>
+        <p:txBody>
+          <a:bodyPr wrap="square" lIns="0" tIns="0" rIns="0" bIns="0" rtlCol="0" anchor="ctr"/>
+          <a:lstStyle/>
+          <a:p>
+            <a:pPr marL="0" indent="0">
+              <a:buNone/>
+            </a:pPr>
+            <a:r>
+              <a:rPr lang="en-US" sz="1250" dirty="0">
+                <a:solidFill>
+                  <a:srgbClr val="C2CDE0"/>
+                </a:solidFill>
+                <a:latin typeface="Calibri" pitchFamily="34" charset="0"/>
+                <a:ea typeface="Calibri" pitchFamily="34" charset="-122"/>
+                <a:cs typeface="Calibri" pitchFamily="34" charset="-120"/>
+              </a:rPr>
+              <a:t>Executive summary</a:t>
+            </a:r>
+            <a:endParaRPr lang="en-US" sz="1250" dirty="0"/>
+          </a:p>
+        </p:txBody>
+      </p:sp>
+      <p:sp>
+        <p:nvSpPr>
+          <p:cNvPr id="26" name="Text 24"/>
+          <p:cNvSpPr/>
+          <p:nvPr/>
+        </p:nvSpPr>
+        <p:spPr>
+          <a:xfrm>
+            <a:off x="6455664" y="3621024"/>
+            <a:ext cx="320040" cy="310896"/>
+          </a:xfrm>
+          <a:prstGeom prst="rect">
+            <a:avLst/>
+          </a:prstGeom>
+          <a:noFill/>
+          <a:ln/>
+        </p:spPr>
+        <p:txBody>
+          <a:bodyPr wrap="square" lIns="0" tIns="0" rIns="0" bIns="0" rtlCol="0" anchor="ctr"/>
+          <a:lstStyle/>
+          <a:p>
+            <a:pPr marL="0" indent="0">
+              <a:buNone/>
+            </a:pPr>
+            <a:r>
+              <a:rPr lang="en-US" sz="1300" b="1" dirty="0">
+                <a:solidFill>
+                  <a:srgbClr val="35C98A"/>
+                </a:solidFill>
+                <a:latin typeface="Calibri" pitchFamily="34" charset="0"/>
+                <a:ea typeface="Calibri" pitchFamily="34" charset="-122"/>
+                <a:cs typeface="Calibri" pitchFamily="34" charset="-120"/>
+              </a:rPr>
+              <a:t>✓</a:t>
+            </a:r>
+            <a:endParaRPr lang="en-US" sz="1300" dirty="0"/>
+          </a:p>
+        </p:txBody>
+      </p:sp>
+      <p:sp>
+        <p:nvSpPr>
+          <p:cNvPr id="27" name="Text 25"/>
+          <p:cNvSpPr/>
+          <p:nvPr/>
+        </p:nvSpPr>
+        <p:spPr>
+          <a:xfrm>
+            <a:off x="6784848" y="3621024"/>
+            <a:ext cx="4297680" cy="310896"/>
+          </a:xfrm>
+          <a:prstGeom prst="rect">
+            <a:avLst/>
+          </a:prstGeom>
+          <a:noFill/>
+          <a:ln/>
+        </p:spPr>
+        <p:txBody>
+          <a:bodyPr wrap="square" lIns="0" tIns="0" rIns="0" bIns="0" rtlCol="0" anchor="ctr"/>
+          <a:lstStyle/>
+          <a:p>
+            <a:pPr marL="0" indent="0">
+              <a:buNone/>
+            </a:pPr>
+            <a:r>
+              <a:rPr lang="en-US" sz="1250" dirty="0">
+                <a:solidFill>
+                  <a:srgbClr val="C2CDE0"/>
+                </a:solidFill>
+                <a:latin typeface="Calibri" pitchFamily="34" charset="0"/>
+                <a:ea typeface="Calibri" pitchFamily="34" charset="-122"/>
+                <a:cs typeface="Calibri" pitchFamily="34" charset="-120"/>
+              </a:rPr>
+              <a:t>Key reconciliation metrics</a:t>
+            </a:r>
+            <a:endParaRPr lang="en-US" sz="1250" dirty="0"/>
+          </a:p>
+        </p:txBody>
+      </p:sp>
+      <p:sp>
+        <p:nvSpPr>
+          <p:cNvPr id="28" name="Text 26"/>
+          <p:cNvSpPr/>
+          <p:nvPr/>
+        </p:nvSpPr>
+        <p:spPr>
+          <a:xfrm>
+            <a:off x="6455664" y="4041648"/>
+            <a:ext cx="320040" cy="310896"/>
+          </a:xfrm>
+          <a:prstGeom prst="rect">
+            <a:avLst/>
+          </a:prstGeom>
+          <a:noFill/>
+          <a:ln/>
+        </p:spPr>
+        <p:txBody>
+          <a:bodyPr wrap="square" lIns="0" tIns="0" rIns="0" bIns="0" rtlCol="0" anchor="ctr"/>
+          <a:lstStyle/>
+          <a:p>
+            <a:pPr marL="0" indent="0">
+              <a:buNone/>
+            </a:pPr>
+            <a:r>
+              <a:rPr lang="en-US" sz="1300" b="1" dirty="0">
+                <a:solidFill>
+                  <a:srgbClr val="35C98A"/>
+                </a:solidFill>
+                <a:latin typeface="Calibri" pitchFamily="34" charset="0"/>
+                <a:ea typeface="Calibri" pitchFamily="34" charset="-122"/>
+                <a:cs typeface="Calibri" pitchFamily="34" charset="-120"/>
+              </a:rPr>
+              <a:t>✓</a:t>
+            </a:r>
+            <a:endParaRPr lang="en-US" sz="1300" dirty="0"/>
+          </a:p>
+        </p:txBody>
+      </p:sp>
+      <p:sp>
+        <p:nvSpPr>
+          <p:cNvPr id="29" name="Text 27"/>
+          <p:cNvSpPr/>
+          <p:nvPr/>
+        </p:nvSpPr>
+        <p:spPr>
+          <a:xfrm>
+            <a:off x="6784848" y="4041648"/>
+            <a:ext cx="4297680" cy="310896"/>
+          </a:xfrm>
+          <a:prstGeom prst="rect">
+            <a:avLst/>
+          </a:prstGeom>
+          <a:noFill/>
+          <a:ln/>
+        </p:spPr>
+        <p:txBody>
+          <a:bodyPr wrap="square" lIns="0" tIns="0" rIns="0" bIns="0" rtlCol="0" anchor="ctr"/>
+          <a:lstStyle/>
+          <a:p>
+            <a:pPr marL="0" indent="0">
+              <a:buNone/>
+            </a:pPr>
+            <a:r>
+              <a:rPr lang="en-US" sz="1250" dirty="0">
+                <a:solidFill>
+                  <a:srgbClr val="C2CDE0"/>
+                </a:solidFill>
+                <a:latin typeface="Calibri" pitchFamily="34" charset="0"/>
+                <a:ea typeface="Calibri" pitchFamily="34" charset="-122"/>
+                <a:cs typeface="Calibri" pitchFamily="34" charset="-120"/>
+              </a:rPr>
+              <a:t>Per-invoice detail with AI notes</a:t>
+            </a:r>
+            <a:endParaRPr lang="en-US" sz="1250" dirty="0"/>
+          </a:p>
+        </p:txBody>
+      </p:sp>
+      <p:sp>
+        <p:nvSpPr>
+          <p:cNvPr id="30" name="Text 28"/>
+          <p:cNvSpPr/>
+          <p:nvPr/>
+        </p:nvSpPr>
+        <p:spPr>
+          <a:xfrm>
+            <a:off x="6455664" y="4462272"/>
+            <a:ext cx="320040" cy="310896"/>
+          </a:xfrm>
+          <a:prstGeom prst="rect">
+            <a:avLst/>
+          </a:prstGeom>
+          <a:noFill/>
+          <a:ln/>
+        </p:spPr>
+        <p:txBody>
+          <a:bodyPr wrap="square" lIns="0" tIns="0" rIns="0" bIns="0" rtlCol="0" anchor="ctr"/>
+          <a:lstStyle/>
+          <a:p>
+            <a:pPr marL="0" indent="0">
+              <a:buNone/>
+            </a:pPr>
+            <a:r>
+              <a:rPr lang="en-US" sz="1300" b="1" dirty="0">
+                <a:solidFill>
+                  <a:srgbClr val="35C98A"/>
+                </a:solidFill>
+                <a:latin typeface="Calibri" pitchFamily="34" charset="0"/>
+                <a:ea typeface="Calibri" pitchFamily="34" charset="-122"/>
+                <a:cs typeface="Calibri" pitchFamily="34" charset="-120"/>
+              </a:rPr>
+              <a:t>✓</a:t>
+            </a:r>
+            <a:endParaRPr lang="en-US" sz="1300" dirty="0"/>
+          </a:p>
+        </p:txBody>
+      </p:sp>
+      <p:sp>
+        <p:nvSpPr>
+          <p:cNvPr id="31" name="Text 29"/>
+          <p:cNvSpPr/>
+          <p:nvPr/>
+        </p:nvSpPr>
+        <p:spPr>
+          <a:xfrm>
+            <a:off x="6784848" y="4462272"/>
+            <a:ext cx="4297680" cy="310896"/>
+          </a:xfrm>
+          <a:prstGeom prst="rect">
+            <a:avLst/>
+          </a:prstGeom>
+          <a:noFill/>
+          <a:ln/>
+        </p:spPr>
+        <p:txBody>
+          <a:bodyPr wrap="square" lIns="0" tIns="0" rIns="0" bIns="0" rtlCol="0" anchor="ctr"/>
+          <a:lstStyle/>
+          <a:p>
+            <a:pPr marL="0" indent="0">
+              <a:buNone/>
+            </a:pPr>
+            <a:r>
+              <a:rPr lang="en-US" sz="1250" dirty="0">
+                <a:solidFill>
+                  <a:srgbClr val="C2CDE0"/>
+                </a:solidFill>
+                <a:latin typeface="Calibri" pitchFamily="34" charset="0"/>
+                <a:ea typeface="Calibri" pitchFamily="34" charset="-122"/>
+                <a:cs typeface="Calibri" pitchFamily="34" charset="-120"/>
+              </a:rPr>
+              <a:t>Anomaly &amp; risk log</a:t>
+            </a:r>
+            <a:endParaRPr lang="en-US" sz="1250" dirty="0"/>
+          </a:p>
+        </p:txBody>
+      </p:sp>
+      <p:sp>
+        <p:nvSpPr>
+          <p:cNvPr id="32" name="Text 30"/>
+          <p:cNvSpPr/>
+          <p:nvPr/>
+        </p:nvSpPr>
+        <p:spPr>
+          <a:xfrm>
+            <a:off x="6455664" y="4882896"/>
+            <a:ext cx="320040" cy="310896"/>
+          </a:xfrm>
+          <a:prstGeom prst="rect">
+            <a:avLst/>
+          </a:prstGeom>
+          <a:noFill/>
+          <a:ln/>
+        </p:spPr>
+        <p:txBody>
+          <a:bodyPr wrap="square" lIns="0" tIns="0" rIns="0" bIns="0" rtlCol="0" anchor="ctr"/>
+          <a:lstStyle/>
+          <a:p>
+            <a:pPr marL="0" indent="0">
+              <a:buNone/>
+            </a:pPr>
+            <a:r>
+              <a:rPr lang="en-US" sz="1300" b="1" dirty="0">
+                <a:solidFill>
+                  <a:srgbClr val="35C98A"/>
+                </a:solidFill>
+                <a:latin typeface="Calibri" pitchFamily="34" charset="0"/>
+                <a:ea typeface="Calibri" pitchFamily="34" charset="-122"/>
+                <a:cs typeface="Calibri" pitchFamily="34" charset="-120"/>
+              </a:rPr>
+              <a:t>✓</a:t>
+            </a:r>
+            <a:endParaRPr lang="en-US" sz="1300" dirty="0"/>
+          </a:p>
+        </p:txBody>
+      </p:sp>
+      <p:sp>
+        <p:nvSpPr>
+          <p:cNvPr id="33" name="Text 31"/>
+          <p:cNvSpPr/>
+          <p:nvPr/>
+        </p:nvSpPr>
+        <p:spPr>
+          <a:xfrm>
+            <a:off x="6784848" y="4882896"/>
+            <a:ext cx="4297680" cy="310896"/>
+          </a:xfrm>
+          <a:prstGeom prst="rect">
+            <a:avLst/>
+          </a:prstGeom>
+          <a:noFill/>
+          <a:ln/>
+        </p:spPr>
+        <p:txBody>
+          <a:bodyPr wrap="square" lIns="0" tIns="0" rIns="0" bIns="0" rtlCol="0" anchor="ctr"/>
+          <a:lstStyle/>
+          <a:p>
+            <a:pPr marL="0" indent="0">
+              <a:buNone/>
+            </a:pPr>
+            <a:r>
+              <a:rPr lang="en-US" sz="1250" dirty="0">
+                <a:solidFill>
+                  <a:srgbClr val="C2CDE0"/>
+                </a:solidFill>
+                <a:latin typeface="Calibri" pitchFamily="34" charset="0"/>
+                <a:ea typeface="Calibri" pitchFamily="34" charset="-122"/>
+                <a:cs typeface="Calibri" pitchFamily="34" charset="-120"/>
+              </a:rPr>
+              <a:t>Full audit trail</a:t>
+            </a:r>
+            <a:endParaRPr lang="en-US" sz="1250" dirty="0"/>
+          </a:p>
+        </p:txBody>
+      </p:sp>
+      <p:sp>
+        <p:nvSpPr>
+          <p:cNvPr id="34" name="Text 32"/>
+          <p:cNvSpPr/>
+          <p:nvPr/>
+        </p:nvSpPr>
+        <p:spPr>
+          <a:xfrm>
+            <a:off x="6455664" y="5303520"/>
+            <a:ext cx="320040" cy="310896"/>
+          </a:xfrm>
+          <a:prstGeom prst="rect">
+            <a:avLst/>
+          </a:prstGeom>
+          <a:noFill/>
+          <a:ln/>
+        </p:spPr>
+        <p:txBody>
+          <a:bodyPr wrap="square" lIns="0" tIns="0" rIns="0" bIns="0" rtlCol="0" anchor="ctr"/>
+          <a:lstStyle/>
+          <a:p>
+            <a:pPr marL="0" indent="0">
+              <a:buNone/>
+            </a:pPr>
+            <a:r>
+              <a:rPr lang="en-US" sz="1300" b="1" dirty="0">
+                <a:solidFill>
+                  <a:srgbClr val="35C98A"/>
+                </a:solidFill>
+                <a:latin typeface="Calibri" pitchFamily="34" charset="0"/>
+                <a:ea typeface="Calibri" pitchFamily="34" charset="-122"/>
+                <a:cs typeface="Calibri" pitchFamily="34" charset="-120"/>
+              </a:rPr>
+              <a:t>✓</a:t>
+            </a:r>
+            <a:endParaRPr lang="en-US" sz="1300" dirty="0"/>
+          </a:p>
+        </p:txBody>
+      </p:sp>
+      <p:sp>
+        <p:nvSpPr>
+          <p:cNvPr id="35" name="Text 33"/>
+          <p:cNvSpPr/>
+          <p:nvPr/>
+        </p:nvSpPr>
+        <p:spPr>
+          <a:xfrm>
+            <a:off x="6784848" y="5303520"/>
+            <a:ext cx="4297680" cy="310896"/>
+          </a:xfrm>
+          <a:prstGeom prst="rect">
+            <a:avLst/>
+          </a:prstGeom>
+          <a:noFill/>
+          <a:ln/>
+        </p:spPr>
+        <p:txBody>
+          <a:bodyPr wrap="square" lIns="0" tIns="0" rIns="0" bIns="0" rtlCol="0" anchor="ctr"/>
+          <a:lstStyle/>
+          <a:p>
+            <a:pPr marL="0" indent="0">
+              <a:buNone/>
+            </a:pPr>
+            <a:r>
+              <a:rPr lang="en-US" sz="1250" dirty="0">
+                <a:solidFill>
+                  <a:srgbClr val="C2CDE0"/>
+                </a:solidFill>
+                <a:latin typeface="Calibri" pitchFamily="34" charset="0"/>
+                <a:ea typeface="Calibri" pitchFamily="34" charset="-122"/>
+                <a:cs typeface="Calibri" pitchFamily="34" charset="-120"/>
+              </a:rPr>
+              <a:t>Methodology &amp; disclaimer</a:t>
+            </a:r>
+            <a:endParaRPr lang="en-US" sz="1250" dirty="0"/>
+          </a:p>
+        </p:txBody>
+      </p:sp>
+      <p:sp>
+        <p:nvSpPr>
+          <p:cNvPr id="36" name="Text 34"/>
+          <p:cNvSpPr/>
+          <p:nvPr/>
+        </p:nvSpPr>
+        <p:spPr>
+          <a:xfrm>
+            <a:off x="11430000" y="6355080"/>
+            <a:ext cx="640080" cy="320040"/>
+          </a:xfrm>
+          <a:prstGeom prst="rect">
+            <a:avLst/>
+          </a:prstGeom>
+          <a:noFill/>
+          <a:ln/>
+        </p:spPr>
+        <p:txBody>
+          <a:bodyPr wrap="square" lIns="0" tIns="0" rIns="0" bIns="0" rtlCol="0" anchor="ctr"/>
+          <a:lstStyle/>
+          <a:p>
+            <a:pPr marL="0" indent="0" algn="r">
+              <a:buNone/>
+            </a:pPr>
+            <a:r>
+              <a:rPr lang="en-US" sz="1000" kern="0" spc="100" dirty="0">
+                <a:solidFill>
+                  <a:srgbClr val="6A7795"/>
+                </a:solidFill>
+                <a:latin typeface="Calibri" pitchFamily="34" charset="0"/>
+                <a:ea typeface="Calibri" pitchFamily="34" charset="-122"/>
+                <a:cs typeface="Calibri" pitchFamily="34" charset="-120"/>
+              </a:rPr>
+              <a:t>09</a:t>
+            </a:r>
+            <a:endParaRPr lang="en-US" sz="1000" dirty="0"/>
+          </a:p>
+        </p:txBody>
+      </p:sp>
+    </p:spTree>
+  </p:cSld>
+  <p:clrMapOvr>
+    <a:masterClrMapping/>
+  </p:clrMapOvr>
+</p:sld>
+</file>
+
+<file path=ppt/slides/slide11.xml><?xml version="1.0" encoding="utf-8"?>
+<p:sld xmlns:a="http://schemas.openxmlformats.org/drawingml/2006/main" xmlns:r="http://schemas.openxmlformats.org/officeDocument/2006/relationships" xmlns:p="http://schemas.openxmlformats.org/presentationml/2006/main">
   <p:cSld name="Slide 10">
     <p:bg>
       <p:bgPr>
@@ -2062,1046 +3442,14 @@
         </p:blipFill>
         <p:spPr>
           <a:xfrm>
-            <a:off x="2046546" y="1417320"/>
-            <a:ext cx="8425922" cy="5257800"/>
+            <a:off x="2603747" y="1717188"/>
+            <a:ext cx="7436898" cy="4957932"/>
           </a:xfrm>
           <a:prstGeom prst="rect">
             <a:avLst/>
           </a:prstGeom>
         </p:spPr>
       </p:pic>
-    </p:spTree>
-  </p:cSld>
-  <p:clrMapOvr>
-    <a:masterClrMapping/>
-  </p:clrMapOvr>
-</p:sld>
-</file>
-
-<file path=ppt/slides/slide11.xml><?xml version="1.0" encoding="utf-8"?>
-<p:sld xmlns:a="http://schemas.openxmlformats.org/drawingml/2006/main" xmlns:r="http://schemas.openxmlformats.org/officeDocument/2006/relationships" xmlns:p="http://schemas.openxmlformats.org/presentationml/2006/main">
-  <p:cSld name="Slide 11">
-    <p:bg>
-      <p:bgPr>
-        <a:solidFill>
-          <a:srgbClr val="070B14"/>
-        </a:solidFill>
-        <a:effectLst/>
-      </p:bgPr>
-    </p:bg>
-    <p:spTree>
-      <p:nvGrpSpPr>
-        <p:cNvPr id="1" name=""/>
-        <p:cNvGrpSpPr/>
-        <p:nvPr/>
-      </p:nvGrpSpPr>
-      <p:grpSpPr>
-        <a:xfrm>
-          <a:off x="0" y="0"/>
-          <a:ext cx="0" cy="0"/>
-          <a:chOff x="0" y="0"/>
-          <a:chExt cx="0" cy="0"/>
-        </a:xfrm>
-      </p:grpSpPr>
-      <p:sp>
-        <p:nvSpPr>
-          <p:cNvPr id="2" name="Text 0"/>
-          <p:cNvSpPr/>
-          <p:nvPr/>
-        </p:nvSpPr>
-        <p:spPr>
-          <a:xfrm>
-            <a:off x="841248" y="566928"/>
-            <a:ext cx="7315200" cy="274320"/>
-          </a:xfrm>
-          <a:prstGeom prst="rect">
-            <a:avLst/>
-          </a:prstGeom>
-          <a:noFill/>
-          <a:ln/>
-        </p:spPr>
-        <p:txBody>
-          <a:bodyPr wrap="square" lIns="0" tIns="0" rIns="0" bIns="0" rtlCol="0" anchor="ctr"/>
-          <a:lstStyle/>
-          <a:p>
-            <a:pPr marL="0" indent="0">
-              <a:buNone/>
-            </a:pPr>
-            <a:r>
-              <a:rPr lang="en-US" sz="1100" b="1" kern="0" spc="300" dirty="0">
-                <a:solidFill>
-                  <a:srgbClr val="5B95FF"/>
-                </a:solidFill>
-                <a:latin typeface="Calibri" pitchFamily="34" charset="0"/>
-                <a:ea typeface="Calibri" pitchFamily="34" charset="-122"/>
-                <a:cs typeface="Calibri" pitchFamily="34" charset="-120"/>
-              </a:rPr>
-              <a:t>WHY IT MATTERS</a:t>
-            </a:r>
-            <a:endParaRPr lang="en-US" sz="1100" dirty="0"/>
-          </a:p>
-        </p:txBody>
-      </p:sp>
-      <p:sp>
-        <p:nvSpPr>
-          <p:cNvPr id="3" name="Text 1"/>
-          <p:cNvSpPr/>
-          <p:nvPr/>
-        </p:nvSpPr>
-        <p:spPr>
-          <a:xfrm>
-            <a:off x="822960" y="868680"/>
-            <a:ext cx="10698480" cy="777240"/>
-          </a:xfrm>
-          <a:prstGeom prst="rect">
-            <a:avLst/>
-          </a:prstGeom>
-          <a:noFill/>
-          <a:ln/>
-        </p:spPr>
-        <p:txBody>
-          <a:bodyPr wrap="square" lIns="0" tIns="0" rIns="0" bIns="0" rtlCol="0" anchor="ctr"/>
-          <a:lstStyle/>
-          <a:p>
-            <a:pPr marL="0" indent="0">
-              <a:buNone/>
-            </a:pPr>
-            <a:r>
-              <a:rPr lang="en-US" sz="3000" b="1" dirty="0">
-                <a:solidFill>
-                  <a:srgbClr val="F3F6FC"/>
-                </a:solidFill>
-                <a:latin typeface="Georgia" pitchFamily="34" charset="0"/>
-                <a:ea typeface="Georgia" pitchFamily="34" charset="-122"/>
-                <a:cs typeface="Georgia" pitchFamily="34" charset="-120"/>
-              </a:rPr>
-              <a:t>Accurate, explainable, audit-ready.</a:t>
-            </a:r>
-            <a:endParaRPr lang="en-US" sz="3000" dirty="0"/>
-          </a:p>
-        </p:txBody>
-      </p:sp>
-      <p:sp>
-        <p:nvSpPr>
-          <p:cNvPr id="4" name="Shape 2"/>
-          <p:cNvSpPr/>
-          <p:nvPr/>
-        </p:nvSpPr>
-        <p:spPr>
-          <a:xfrm>
-            <a:off x="841248" y="1874520"/>
-            <a:ext cx="3419856" cy="1874520"/>
-          </a:xfrm>
-          <a:prstGeom prst="roundRect">
-            <a:avLst>
-              <a:gd name="adj" fmla="val 3902"/>
-            </a:avLst>
-          </a:prstGeom>
-          <a:solidFill>
-            <a:srgbClr val="101A30"/>
-          </a:solidFill>
-          <a:ln w="12700">
-            <a:solidFill>
-              <a:srgbClr val="243150"/>
-            </a:solidFill>
-            <a:prstDash val="solid"/>
-          </a:ln>
-        </p:spPr>
-        <p:txBody>
-          <a:bodyPr/>
-          <a:lstStyle/>
-          <a:p>
-            <a:endParaRPr lang="en-MY"/>
-          </a:p>
-        </p:txBody>
-      </p:sp>
-      <p:sp>
-        <p:nvSpPr>
-          <p:cNvPr id="5" name="Shape 3"/>
-          <p:cNvSpPr/>
-          <p:nvPr/>
-        </p:nvSpPr>
-        <p:spPr>
-          <a:xfrm>
-            <a:off x="841248" y="1874520"/>
-            <a:ext cx="3419856" cy="64008"/>
-          </a:xfrm>
-          <a:prstGeom prst="rect">
-            <a:avLst/>
-          </a:prstGeom>
-          <a:solidFill>
-            <a:srgbClr val="35C98A"/>
-          </a:solidFill>
-          <a:ln w="12700">
-            <a:solidFill>
-              <a:srgbClr val="35C98A"/>
-            </a:solidFill>
-            <a:prstDash val="solid"/>
-          </a:ln>
-        </p:spPr>
-        <p:txBody>
-          <a:bodyPr/>
-          <a:lstStyle/>
-          <a:p>
-            <a:endParaRPr lang="en-MY"/>
-          </a:p>
-        </p:txBody>
-      </p:sp>
-      <p:sp>
-        <p:nvSpPr>
-          <p:cNvPr id="6" name="Text 4"/>
-          <p:cNvSpPr/>
-          <p:nvPr/>
-        </p:nvSpPr>
-        <p:spPr>
-          <a:xfrm>
-            <a:off x="1078992" y="2130552"/>
-            <a:ext cx="2962656" cy="457200"/>
-          </a:xfrm>
-          <a:prstGeom prst="rect">
-            <a:avLst/>
-          </a:prstGeom>
-          <a:noFill/>
-          <a:ln/>
-        </p:spPr>
-        <p:txBody>
-          <a:bodyPr wrap="square" lIns="0" tIns="0" rIns="0" bIns="0" rtlCol="0" anchor="ctr"/>
-          <a:lstStyle/>
-          <a:p>
-            <a:pPr marL="0" indent="0">
-              <a:buNone/>
-            </a:pPr>
-            <a:r>
-              <a:rPr lang="en-US" sz="1500" b="1" dirty="0">
-                <a:solidFill>
-                  <a:srgbClr val="F3F6FC"/>
-                </a:solidFill>
-                <a:latin typeface="Calibri" pitchFamily="34" charset="0"/>
-                <a:ea typeface="Calibri" pitchFamily="34" charset="-122"/>
-                <a:cs typeface="Calibri" pitchFamily="34" charset="-120"/>
-              </a:rPr>
-              <a:t>Higher accuracy</a:t>
-            </a:r>
-            <a:endParaRPr lang="en-US" sz="1500" dirty="0"/>
-          </a:p>
-        </p:txBody>
-      </p:sp>
-      <p:sp>
-        <p:nvSpPr>
-          <p:cNvPr id="7" name="Text 5"/>
-          <p:cNvSpPr/>
-          <p:nvPr/>
-        </p:nvSpPr>
-        <p:spPr>
-          <a:xfrm>
-            <a:off x="1078992" y="2624328"/>
-            <a:ext cx="2962656" cy="1005840"/>
-          </a:xfrm>
-          <a:prstGeom prst="rect">
-            <a:avLst/>
-          </a:prstGeom>
-          <a:noFill/>
-          <a:ln/>
-        </p:spPr>
-        <p:txBody>
-          <a:bodyPr wrap="square" lIns="0" tIns="0" rIns="0" bIns="0" rtlCol="0" anchor="ctr"/>
-          <a:lstStyle/>
-          <a:p>
-            <a:pPr marL="0" indent="0">
-              <a:lnSpc>
-                <a:spcPts val="1700"/>
-              </a:lnSpc>
-              <a:buNone/>
-            </a:pPr>
-            <a:r>
-              <a:rPr lang="en-US" sz="1200" dirty="0">
-                <a:solidFill>
-                  <a:srgbClr val="6A7795"/>
-                </a:solidFill>
-                <a:latin typeface="Calibri" pitchFamily="34" charset="0"/>
-                <a:ea typeface="Calibri" pitchFamily="34" charset="-122"/>
-                <a:cs typeface="Calibri" pitchFamily="34" charset="-120"/>
-              </a:rPr>
-              <a:t>Deterministic matching removes the guesswork of manual reconciliation.</a:t>
-            </a:r>
-            <a:endParaRPr lang="en-US" sz="1200" dirty="0"/>
-          </a:p>
-        </p:txBody>
-      </p:sp>
-      <p:sp>
-        <p:nvSpPr>
-          <p:cNvPr id="8" name="Shape 6"/>
-          <p:cNvSpPr/>
-          <p:nvPr/>
-        </p:nvSpPr>
-        <p:spPr>
-          <a:xfrm>
-            <a:off x="4370832" y="1874520"/>
-            <a:ext cx="3419856" cy="1874520"/>
-          </a:xfrm>
-          <a:prstGeom prst="roundRect">
-            <a:avLst>
-              <a:gd name="adj" fmla="val 3902"/>
-            </a:avLst>
-          </a:prstGeom>
-          <a:solidFill>
-            <a:srgbClr val="101A30"/>
-          </a:solidFill>
-          <a:ln w="12700">
-            <a:solidFill>
-              <a:srgbClr val="243150"/>
-            </a:solidFill>
-            <a:prstDash val="solid"/>
-          </a:ln>
-        </p:spPr>
-        <p:txBody>
-          <a:bodyPr/>
-          <a:lstStyle/>
-          <a:p>
-            <a:endParaRPr lang="en-MY"/>
-          </a:p>
-        </p:txBody>
-      </p:sp>
-      <p:sp>
-        <p:nvSpPr>
-          <p:cNvPr id="9" name="Shape 7"/>
-          <p:cNvSpPr/>
-          <p:nvPr/>
-        </p:nvSpPr>
-        <p:spPr>
-          <a:xfrm>
-            <a:off x="4370832" y="1874520"/>
-            <a:ext cx="3419856" cy="64008"/>
-          </a:xfrm>
-          <a:prstGeom prst="rect">
-            <a:avLst/>
-          </a:prstGeom>
-          <a:solidFill>
-            <a:srgbClr val="4FD0E0"/>
-          </a:solidFill>
-          <a:ln w="12700">
-            <a:solidFill>
-              <a:srgbClr val="4FD0E0"/>
-            </a:solidFill>
-            <a:prstDash val="solid"/>
-          </a:ln>
-        </p:spPr>
-        <p:txBody>
-          <a:bodyPr/>
-          <a:lstStyle/>
-          <a:p>
-            <a:endParaRPr lang="en-MY"/>
-          </a:p>
-        </p:txBody>
-      </p:sp>
-      <p:sp>
-        <p:nvSpPr>
-          <p:cNvPr id="10" name="Text 8"/>
-          <p:cNvSpPr/>
-          <p:nvPr/>
-        </p:nvSpPr>
-        <p:spPr>
-          <a:xfrm>
-            <a:off x="4608576" y="2130552"/>
-            <a:ext cx="2962656" cy="457200"/>
-          </a:xfrm>
-          <a:prstGeom prst="rect">
-            <a:avLst/>
-          </a:prstGeom>
-          <a:noFill/>
-          <a:ln/>
-        </p:spPr>
-        <p:txBody>
-          <a:bodyPr wrap="square" lIns="0" tIns="0" rIns="0" bIns="0" rtlCol="0" anchor="ctr"/>
-          <a:lstStyle/>
-          <a:p>
-            <a:pPr marL="0" indent="0">
-              <a:buNone/>
-            </a:pPr>
-            <a:r>
-              <a:rPr lang="en-US" sz="1500" b="1" dirty="0">
-                <a:solidFill>
-                  <a:srgbClr val="F3F6FC"/>
-                </a:solidFill>
-                <a:latin typeface="Calibri" pitchFamily="34" charset="0"/>
-                <a:ea typeface="Calibri" pitchFamily="34" charset="-122"/>
-                <a:cs typeface="Calibri" pitchFamily="34" charset="-120"/>
-              </a:rPr>
-              <a:t>Explainable AI</a:t>
-            </a:r>
-            <a:endParaRPr lang="en-US" sz="1500" dirty="0"/>
-          </a:p>
-        </p:txBody>
-      </p:sp>
-      <p:sp>
-        <p:nvSpPr>
-          <p:cNvPr id="11" name="Text 9"/>
-          <p:cNvSpPr/>
-          <p:nvPr/>
-        </p:nvSpPr>
-        <p:spPr>
-          <a:xfrm>
-            <a:off x="4608576" y="2624328"/>
-            <a:ext cx="2962656" cy="1005840"/>
-          </a:xfrm>
-          <a:prstGeom prst="rect">
-            <a:avLst/>
-          </a:prstGeom>
-          <a:noFill/>
-          <a:ln/>
-        </p:spPr>
-        <p:txBody>
-          <a:bodyPr wrap="square" lIns="0" tIns="0" rIns="0" bIns="0" rtlCol="0" anchor="ctr"/>
-          <a:lstStyle/>
-          <a:p>
-            <a:pPr marL="0" indent="0">
-              <a:lnSpc>
-                <a:spcPts val="1700"/>
-              </a:lnSpc>
-              <a:buNone/>
-            </a:pPr>
-            <a:r>
-              <a:rPr lang="en-US" sz="1200" dirty="0">
-                <a:solidFill>
-                  <a:srgbClr val="6A7795"/>
-                </a:solidFill>
-                <a:latin typeface="Calibri" pitchFamily="34" charset="0"/>
-                <a:ea typeface="Calibri" pitchFamily="34" charset="-122"/>
-                <a:cs typeface="Calibri" pitchFamily="34" charset="-120"/>
-              </a:rPr>
-              <a:t>Every decision comes with human-readable reasoning and a confidence score.</a:t>
-            </a:r>
-            <a:endParaRPr lang="en-US" sz="1200" dirty="0"/>
-          </a:p>
-        </p:txBody>
-      </p:sp>
-      <p:sp>
-        <p:nvSpPr>
-          <p:cNvPr id="12" name="Shape 10"/>
-          <p:cNvSpPr/>
-          <p:nvPr/>
-        </p:nvSpPr>
-        <p:spPr>
-          <a:xfrm>
-            <a:off x="7900416" y="1874520"/>
-            <a:ext cx="3419856" cy="1874520"/>
-          </a:xfrm>
-          <a:prstGeom prst="roundRect">
-            <a:avLst>
-              <a:gd name="adj" fmla="val 3902"/>
-            </a:avLst>
-          </a:prstGeom>
-          <a:solidFill>
-            <a:srgbClr val="101A30"/>
-          </a:solidFill>
-          <a:ln w="12700">
-            <a:solidFill>
-              <a:srgbClr val="243150"/>
-            </a:solidFill>
-            <a:prstDash val="solid"/>
-          </a:ln>
-        </p:spPr>
-        <p:txBody>
-          <a:bodyPr/>
-          <a:lstStyle/>
-          <a:p>
-            <a:endParaRPr lang="en-MY"/>
-          </a:p>
-        </p:txBody>
-      </p:sp>
-      <p:sp>
-        <p:nvSpPr>
-          <p:cNvPr id="13" name="Shape 11"/>
-          <p:cNvSpPr/>
-          <p:nvPr/>
-        </p:nvSpPr>
-        <p:spPr>
-          <a:xfrm>
-            <a:off x="7900416" y="1874520"/>
-            <a:ext cx="3419856" cy="64008"/>
-          </a:xfrm>
-          <a:prstGeom prst="rect">
-            <a:avLst/>
-          </a:prstGeom>
-          <a:solidFill>
-            <a:srgbClr val="E5823C"/>
-          </a:solidFill>
-          <a:ln w="12700">
-            <a:solidFill>
-              <a:srgbClr val="E5823C"/>
-            </a:solidFill>
-            <a:prstDash val="solid"/>
-          </a:ln>
-        </p:spPr>
-        <p:txBody>
-          <a:bodyPr/>
-          <a:lstStyle/>
-          <a:p>
-            <a:endParaRPr lang="en-MY"/>
-          </a:p>
-        </p:txBody>
-      </p:sp>
-      <p:sp>
-        <p:nvSpPr>
-          <p:cNvPr id="14" name="Text 12"/>
-          <p:cNvSpPr/>
-          <p:nvPr/>
-        </p:nvSpPr>
-        <p:spPr>
-          <a:xfrm>
-            <a:off x="8138160" y="2130552"/>
-            <a:ext cx="2962656" cy="457200"/>
-          </a:xfrm>
-          <a:prstGeom prst="rect">
-            <a:avLst/>
-          </a:prstGeom>
-          <a:noFill/>
-          <a:ln/>
-        </p:spPr>
-        <p:txBody>
-          <a:bodyPr wrap="square" lIns="0" tIns="0" rIns="0" bIns="0" rtlCol="0" anchor="ctr"/>
-          <a:lstStyle/>
-          <a:p>
-            <a:pPr marL="0" indent="0">
-              <a:buNone/>
-            </a:pPr>
-            <a:r>
-              <a:rPr lang="en-US" sz="1500" b="1" dirty="0">
-                <a:solidFill>
-                  <a:srgbClr val="F3F6FC"/>
-                </a:solidFill>
-                <a:latin typeface="Calibri" pitchFamily="34" charset="0"/>
-                <a:ea typeface="Calibri" pitchFamily="34" charset="-122"/>
-                <a:cs typeface="Calibri" pitchFamily="34" charset="-120"/>
-              </a:rPr>
-              <a:t>Better fraud detection</a:t>
-            </a:r>
-            <a:endParaRPr lang="en-US" sz="1500" dirty="0"/>
-          </a:p>
-        </p:txBody>
-      </p:sp>
-      <p:sp>
-        <p:nvSpPr>
-          <p:cNvPr id="15" name="Text 13"/>
-          <p:cNvSpPr/>
-          <p:nvPr/>
-        </p:nvSpPr>
-        <p:spPr>
-          <a:xfrm>
-            <a:off x="8138160" y="2624328"/>
-            <a:ext cx="2962656" cy="1005840"/>
-          </a:xfrm>
-          <a:prstGeom prst="rect">
-            <a:avLst/>
-          </a:prstGeom>
-          <a:noFill/>
-          <a:ln/>
-        </p:spPr>
-        <p:txBody>
-          <a:bodyPr wrap="square" lIns="0" tIns="0" rIns="0" bIns="0" rtlCol="0" anchor="ctr"/>
-          <a:lstStyle/>
-          <a:p>
-            <a:pPr marL="0" indent="0">
-              <a:lnSpc>
-                <a:spcPts val="1700"/>
-              </a:lnSpc>
-              <a:buNone/>
-            </a:pPr>
-            <a:r>
-              <a:rPr lang="en-US" sz="1200" dirty="0">
-                <a:solidFill>
-                  <a:srgbClr val="6A7795"/>
-                </a:solidFill>
-                <a:latin typeface="Calibri" pitchFamily="34" charset="0"/>
-                <a:ea typeface="Calibri" pitchFamily="34" charset="-122"/>
-                <a:cs typeface="Calibri" pitchFamily="34" charset="-120"/>
-              </a:rPr>
-              <a:t>Rules, statistics and AI reasoning combine to surface real risk.</a:t>
-            </a:r>
-            <a:endParaRPr lang="en-US" sz="1200" dirty="0"/>
-          </a:p>
-        </p:txBody>
-      </p:sp>
-      <p:sp>
-        <p:nvSpPr>
-          <p:cNvPr id="16" name="Shape 14"/>
-          <p:cNvSpPr/>
-          <p:nvPr/>
-        </p:nvSpPr>
-        <p:spPr>
-          <a:xfrm>
-            <a:off x="841248" y="3895344"/>
-            <a:ext cx="3419856" cy="1874520"/>
-          </a:xfrm>
-          <a:prstGeom prst="roundRect">
-            <a:avLst>
-              <a:gd name="adj" fmla="val 3902"/>
-            </a:avLst>
-          </a:prstGeom>
-          <a:solidFill>
-            <a:srgbClr val="101A30"/>
-          </a:solidFill>
-          <a:ln w="12700">
-            <a:solidFill>
-              <a:srgbClr val="243150"/>
-            </a:solidFill>
-            <a:prstDash val="solid"/>
-          </a:ln>
-        </p:spPr>
-        <p:txBody>
-          <a:bodyPr/>
-          <a:lstStyle/>
-          <a:p>
-            <a:endParaRPr lang="en-MY"/>
-          </a:p>
-        </p:txBody>
-      </p:sp>
-      <p:sp>
-        <p:nvSpPr>
-          <p:cNvPr id="17" name="Shape 15"/>
-          <p:cNvSpPr/>
-          <p:nvPr/>
-        </p:nvSpPr>
-        <p:spPr>
-          <a:xfrm>
-            <a:off x="841248" y="3895344"/>
-            <a:ext cx="3419856" cy="64008"/>
-          </a:xfrm>
-          <a:prstGeom prst="rect">
-            <a:avLst/>
-          </a:prstGeom>
-          <a:solidFill>
-            <a:srgbClr val="5B95FF"/>
-          </a:solidFill>
-          <a:ln w="12700">
-            <a:solidFill>
-              <a:srgbClr val="5B95FF"/>
-            </a:solidFill>
-            <a:prstDash val="solid"/>
-          </a:ln>
-        </p:spPr>
-        <p:txBody>
-          <a:bodyPr/>
-          <a:lstStyle/>
-          <a:p>
-            <a:endParaRPr lang="en-MY"/>
-          </a:p>
-        </p:txBody>
-      </p:sp>
-      <p:sp>
-        <p:nvSpPr>
-          <p:cNvPr id="18" name="Text 16"/>
-          <p:cNvSpPr/>
-          <p:nvPr/>
-        </p:nvSpPr>
-        <p:spPr>
-          <a:xfrm>
-            <a:off x="1078992" y="4151376"/>
-            <a:ext cx="2962656" cy="457200"/>
-          </a:xfrm>
-          <a:prstGeom prst="rect">
-            <a:avLst/>
-          </a:prstGeom>
-          <a:noFill/>
-          <a:ln/>
-        </p:spPr>
-        <p:txBody>
-          <a:bodyPr wrap="square" lIns="0" tIns="0" rIns="0" bIns="0" rtlCol="0" anchor="ctr"/>
-          <a:lstStyle/>
-          <a:p>
-            <a:pPr marL="0" indent="0">
-              <a:buNone/>
-            </a:pPr>
-            <a:r>
-              <a:rPr lang="en-US" sz="1500" b="1" dirty="0">
-                <a:solidFill>
-                  <a:srgbClr val="F3F6FC"/>
-                </a:solidFill>
-                <a:latin typeface="Calibri" pitchFamily="34" charset="0"/>
-                <a:ea typeface="Calibri" pitchFamily="34" charset="-122"/>
-                <a:cs typeface="Calibri" pitchFamily="34" charset="-120"/>
-              </a:rPr>
-              <a:t>Full auditability</a:t>
-            </a:r>
-            <a:endParaRPr lang="en-US" sz="1500" dirty="0"/>
-          </a:p>
-        </p:txBody>
-      </p:sp>
-      <p:sp>
-        <p:nvSpPr>
-          <p:cNvPr id="19" name="Text 17"/>
-          <p:cNvSpPr/>
-          <p:nvPr/>
-        </p:nvSpPr>
-        <p:spPr>
-          <a:xfrm>
-            <a:off x="1078992" y="4645152"/>
-            <a:ext cx="2962656" cy="1005840"/>
-          </a:xfrm>
-          <a:prstGeom prst="rect">
-            <a:avLst/>
-          </a:prstGeom>
-          <a:noFill/>
-          <a:ln/>
-        </p:spPr>
-        <p:txBody>
-          <a:bodyPr wrap="square" lIns="0" tIns="0" rIns="0" bIns="0" rtlCol="0" anchor="ctr"/>
-          <a:lstStyle/>
-          <a:p>
-            <a:pPr marL="0" indent="0">
-              <a:lnSpc>
-                <a:spcPts val="1700"/>
-              </a:lnSpc>
-              <a:buNone/>
-            </a:pPr>
-            <a:r>
-              <a:rPr lang="en-US" sz="1200" dirty="0">
-                <a:solidFill>
-                  <a:srgbClr val="6A7795"/>
-                </a:solidFill>
-                <a:latin typeface="Calibri" pitchFamily="34" charset="0"/>
-                <a:ea typeface="Calibri" pitchFamily="34" charset="-122"/>
-                <a:cs typeface="Calibri" pitchFamily="34" charset="-120"/>
-              </a:rPr>
-              <a:t>A complete trail and a professional PDF report for every scan.</a:t>
-            </a:r>
-            <a:endParaRPr lang="en-US" sz="1200" dirty="0"/>
-          </a:p>
-        </p:txBody>
-      </p:sp>
-      <p:sp>
-        <p:nvSpPr>
-          <p:cNvPr id="20" name="Shape 18"/>
-          <p:cNvSpPr/>
-          <p:nvPr/>
-        </p:nvSpPr>
-        <p:spPr>
-          <a:xfrm>
-            <a:off x="4370832" y="3895344"/>
-            <a:ext cx="3419856" cy="1874520"/>
-          </a:xfrm>
-          <a:prstGeom prst="roundRect">
-            <a:avLst>
-              <a:gd name="adj" fmla="val 3902"/>
-            </a:avLst>
-          </a:prstGeom>
-          <a:solidFill>
-            <a:srgbClr val="101A30"/>
-          </a:solidFill>
-          <a:ln w="12700">
-            <a:solidFill>
-              <a:srgbClr val="243150"/>
-            </a:solidFill>
-            <a:prstDash val="solid"/>
-          </a:ln>
-        </p:spPr>
-        <p:txBody>
-          <a:bodyPr/>
-          <a:lstStyle/>
-          <a:p>
-            <a:endParaRPr lang="en-MY"/>
-          </a:p>
-        </p:txBody>
-      </p:sp>
-      <p:sp>
-        <p:nvSpPr>
-          <p:cNvPr id="21" name="Shape 19"/>
-          <p:cNvSpPr/>
-          <p:nvPr/>
-        </p:nvSpPr>
-        <p:spPr>
-          <a:xfrm>
-            <a:off x="4370832" y="3895344"/>
-            <a:ext cx="3419856" cy="64008"/>
-          </a:xfrm>
-          <a:prstGeom prst="rect">
-            <a:avLst/>
-          </a:prstGeom>
-          <a:solidFill>
-            <a:srgbClr val="5B95FF"/>
-          </a:solidFill>
-          <a:ln w="12700">
-            <a:solidFill>
-              <a:srgbClr val="5B95FF"/>
-            </a:solidFill>
-            <a:prstDash val="solid"/>
-          </a:ln>
-        </p:spPr>
-        <p:txBody>
-          <a:bodyPr/>
-          <a:lstStyle/>
-          <a:p>
-            <a:endParaRPr lang="en-MY"/>
-          </a:p>
-        </p:txBody>
-      </p:sp>
-      <p:sp>
-        <p:nvSpPr>
-          <p:cNvPr id="22" name="Text 20"/>
-          <p:cNvSpPr/>
-          <p:nvPr/>
-        </p:nvSpPr>
-        <p:spPr>
-          <a:xfrm>
-            <a:off x="4608576" y="4151376"/>
-            <a:ext cx="2962656" cy="457200"/>
-          </a:xfrm>
-          <a:prstGeom prst="rect">
-            <a:avLst/>
-          </a:prstGeom>
-          <a:noFill/>
-          <a:ln/>
-        </p:spPr>
-        <p:txBody>
-          <a:bodyPr wrap="square" lIns="0" tIns="0" rIns="0" bIns="0" rtlCol="0" anchor="ctr"/>
-          <a:lstStyle/>
-          <a:p>
-            <a:pPr marL="0" indent="0">
-              <a:buNone/>
-            </a:pPr>
-            <a:r>
-              <a:rPr lang="en-US" sz="1500" b="1" dirty="0">
-                <a:solidFill>
-                  <a:srgbClr val="F3F6FC"/>
-                </a:solidFill>
-                <a:latin typeface="Calibri" pitchFamily="34" charset="0"/>
-                <a:ea typeface="Calibri" pitchFamily="34" charset="-122"/>
-                <a:cs typeface="Calibri" pitchFamily="34" charset="-120"/>
-              </a:rPr>
-              <a:t>Time saved</a:t>
-            </a:r>
-            <a:endParaRPr lang="en-US" sz="1500" dirty="0"/>
-          </a:p>
-        </p:txBody>
-      </p:sp>
-      <p:sp>
-        <p:nvSpPr>
-          <p:cNvPr id="23" name="Text 21"/>
-          <p:cNvSpPr/>
-          <p:nvPr/>
-        </p:nvSpPr>
-        <p:spPr>
-          <a:xfrm>
-            <a:off x="4608576" y="4645152"/>
-            <a:ext cx="2962656" cy="1005840"/>
-          </a:xfrm>
-          <a:prstGeom prst="rect">
-            <a:avLst/>
-          </a:prstGeom>
-          <a:noFill/>
-          <a:ln/>
-        </p:spPr>
-        <p:txBody>
-          <a:bodyPr wrap="square" lIns="0" tIns="0" rIns="0" bIns="0" rtlCol="0" anchor="ctr"/>
-          <a:lstStyle/>
-          <a:p>
-            <a:pPr marL="0" indent="0">
-              <a:lnSpc>
-                <a:spcPts val="1700"/>
-              </a:lnSpc>
-              <a:buNone/>
-            </a:pPr>
-            <a:r>
-              <a:rPr lang="en-US" sz="1200" dirty="0">
-                <a:solidFill>
-                  <a:srgbClr val="6A7795"/>
-                </a:solidFill>
-                <a:latin typeface="Calibri" pitchFamily="34" charset="0"/>
-                <a:ea typeface="Calibri" pitchFamily="34" charset="-122"/>
-                <a:cs typeface="Calibri" pitchFamily="34" charset="-120"/>
-              </a:rPr>
-              <a:t>A multi-hour weekly chore becomes a one-click pipeline.</a:t>
-            </a:r>
-            <a:endParaRPr lang="en-US" sz="1200" dirty="0"/>
-          </a:p>
-        </p:txBody>
-      </p:sp>
-      <p:sp>
-        <p:nvSpPr>
-          <p:cNvPr id="24" name="Shape 22"/>
-          <p:cNvSpPr/>
-          <p:nvPr/>
-        </p:nvSpPr>
-        <p:spPr>
-          <a:xfrm>
-            <a:off x="7900416" y="3895344"/>
-            <a:ext cx="3419856" cy="1874520"/>
-          </a:xfrm>
-          <a:prstGeom prst="roundRect">
-            <a:avLst>
-              <a:gd name="adj" fmla="val 3902"/>
-            </a:avLst>
-          </a:prstGeom>
-          <a:solidFill>
-            <a:srgbClr val="101A30"/>
-          </a:solidFill>
-          <a:ln w="12700">
-            <a:solidFill>
-              <a:srgbClr val="243150"/>
-            </a:solidFill>
-            <a:prstDash val="solid"/>
-          </a:ln>
-        </p:spPr>
-        <p:txBody>
-          <a:bodyPr/>
-          <a:lstStyle/>
-          <a:p>
-            <a:endParaRPr lang="en-MY"/>
-          </a:p>
-        </p:txBody>
-      </p:sp>
-      <p:sp>
-        <p:nvSpPr>
-          <p:cNvPr id="25" name="Shape 23"/>
-          <p:cNvSpPr/>
-          <p:nvPr/>
-        </p:nvSpPr>
-        <p:spPr>
-          <a:xfrm>
-            <a:off x="7900416" y="3895344"/>
-            <a:ext cx="3419856" cy="64008"/>
-          </a:xfrm>
-          <a:prstGeom prst="rect">
-            <a:avLst/>
-          </a:prstGeom>
-          <a:solidFill>
-            <a:srgbClr val="35C98A"/>
-          </a:solidFill>
-          <a:ln w="12700">
-            <a:solidFill>
-              <a:srgbClr val="35C98A"/>
-            </a:solidFill>
-            <a:prstDash val="solid"/>
-          </a:ln>
-        </p:spPr>
-        <p:txBody>
-          <a:bodyPr/>
-          <a:lstStyle/>
-          <a:p>
-            <a:endParaRPr lang="en-MY"/>
-          </a:p>
-        </p:txBody>
-      </p:sp>
-      <p:sp>
-        <p:nvSpPr>
-          <p:cNvPr id="26" name="Text 24"/>
-          <p:cNvSpPr/>
-          <p:nvPr/>
-        </p:nvSpPr>
-        <p:spPr>
-          <a:xfrm>
-            <a:off x="8138160" y="4151376"/>
-            <a:ext cx="2962656" cy="457200"/>
-          </a:xfrm>
-          <a:prstGeom prst="rect">
-            <a:avLst/>
-          </a:prstGeom>
-          <a:noFill/>
-          <a:ln/>
-        </p:spPr>
-        <p:txBody>
-          <a:bodyPr wrap="square" lIns="0" tIns="0" rIns="0" bIns="0" rtlCol="0" anchor="ctr"/>
-          <a:lstStyle/>
-          <a:p>
-            <a:pPr marL="0" indent="0">
-              <a:buNone/>
-            </a:pPr>
-            <a:r>
-              <a:rPr lang="en-US" sz="1500" b="1" dirty="0">
-                <a:solidFill>
-                  <a:srgbClr val="F3F6FC"/>
-                </a:solidFill>
-                <a:latin typeface="Calibri" pitchFamily="34" charset="0"/>
-                <a:ea typeface="Calibri" pitchFamily="34" charset="-122"/>
-                <a:cs typeface="Calibri" pitchFamily="34" charset="-120"/>
-              </a:rPr>
-              <a:t>Fails safe</a:t>
-            </a:r>
-            <a:endParaRPr lang="en-US" sz="1500" dirty="0"/>
-          </a:p>
-        </p:txBody>
-      </p:sp>
-      <p:sp>
-        <p:nvSpPr>
-          <p:cNvPr id="27" name="Text 25"/>
-          <p:cNvSpPr/>
-          <p:nvPr/>
-        </p:nvSpPr>
-        <p:spPr>
-          <a:xfrm>
-            <a:off x="8138160" y="4645152"/>
-            <a:ext cx="2962656" cy="1005840"/>
-          </a:xfrm>
-          <a:prstGeom prst="rect">
-            <a:avLst/>
-          </a:prstGeom>
-          <a:noFill/>
-          <a:ln/>
-        </p:spPr>
-        <p:txBody>
-          <a:bodyPr wrap="square" lIns="0" tIns="0" rIns="0" bIns="0" rtlCol="0" anchor="ctr"/>
-          <a:lstStyle/>
-          <a:p>
-            <a:pPr marL="0" indent="0">
-              <a:lnSpc>
-                <a:spcPts val="1700"/>
-              </a:lnSpc>
-              <a:buNone/>
-            </a:pPr>
-            <a:r>
-              <a:rPr lang="en-US" sz="1200" dirty="0">
-                <a:solidFill>
-                  <a:srgbClr val="6A7795"/>
-                </a:solidFill>
-                <a:latin typeface="Calibri" pitchFamily="34" charset="0"/>
-                <a:ea typeface="Calibri" pitchFamily="34" charset="-122"/>
-                <a:cs typeface="Calibri" pitchFamily="34" charset="-120"/>
-              </a:rPr>
-              <a:t>Deterministic fallbacks keep the system working if the AI is offline.</a:t>
-            </a:r>
-            <a:endParaRPr lang="en-US" sz="1200" dirty="0"/>
-          </a:p>
-        </p:txBody>
-      </p:sp>
-      <p:sp>
-        <p:nvSpPr>
-          <p:cNvPr id="28" name="Text 26"/>
-          <p:cNvSpPr/>
-          <p:nvPr/>
-        </p:nvSpPr>
-        <p:spPr>
-          <a:xfrm>
-            <a:off x="11430000" y="6355080"/>
-            <a:ext cx="640080" cy="320040"/>
-          </a:xfrm>
-          <a:prstGeom prst="rect">
-            <a:avLst/>
-          </a:prstGeom>
-          <a:noFill/>
-          <a:ln/>
-        </p:spPr>
-        <p:txBody>
-          <a:bodyPr wrap="square" lIns="0" tIns="0" rIns="0" bIns="0" rtlCol="0" anchor="ctr"/>
-          <a:lstStyle/>
-          <a:p>
-            <a:pPr marL="0" indent="0" algn="r">
-              <a:buNone/>
-            </a:pPr>
-            <a:r>
-              <a:rPr lang="en-US" sz="1000" kern="0" spc="100" dirty="0">
-                <a:solidFill>
-                  <a:srgbClr val="6A7795"/>
-                </a:solidFill>
-                <a:latin typeface="Calibri" pitchFamily="34" charset="0"/>
-                <a:ea typeface="Calibri" pitchFamily="34" charset="-122"/>
-                <a:cs typeface="Calibri" pitchFamily="34" charset="-120"/>
-              </a:rPr>
-              <a:t>11</a:t>
-            </a:r>
-            <a:endParaRPr lang="en-US" sz="1000" dirty="0"/>
-          </a:p>
-        </p:txBody>
-      </p:sp>
     </p:spTree>
   </p:cSld>
   <p:clrMapOvr>
@@ -3692,6 +4040,889 @@
 
 <file path=ppt/slides/slide2.xml><?xml version="1.0" encoding="utf-8"?>
 <p:sld xmlns:a="http://schemas.openxmlformats.org/drawingml/2006/main" xmlns:r="http://schemas.openxmlformats.org/officeDocument/2006/relationships" xmlns:p="http://schemas.openxmlformats.org/presentationml/2006/main">
+  <p:cSld>
+    <p:bg>
+      <p:bgPr>
+        <a:solidFill>
+          <a:srgbClr val="070B14"/>
+        </a:solidFill>
+        <a:effectLst/>
+      </p:bgPr>
+    </p:bg>
+    <p:spTree>
+      <p:nvGrpSpPr>
+        <p:cNvPr id="1" name="">
+          <a:extLst>
+            <a:ext uri="{FF2B5EF4-FFF2-40B4-BE49-F238E27FC236}">
+              <a16:creationId xmlns:a16="http://schemas.microsoft.com/office/drawing/2014/main" id="{A95932C2-FAD1-D40C-4243-8A188CB33742}"/>
+            </a:ext>
+          </a:extLst>
+        </p:cNvPr>
+        <p:cNvGrpSpPr/>
+        <p:nvPr/>
+      </p:nvGrpSpPr>
+      <p:grpSpPr>
+        <a:xfrm>
+          <a:off x="0" y="0"/>
+          <a:ext cx="0" cy="0"/>
+          <a:chOff x="0" y="0"/>
+          <a:chExt cx="0" cy="0"/>
+        </a:xfrm>
+      </p:grpSpPr>
+      <p:sp>
+        <p:nvSpPr>
+          <p:cNvPr id="2" name="Text 0">
+            <a:extLst>
+              <a:ext uri="{FF2B5EF4-FFF2-40B4-BE49-F238E27FC236}">
+                <a16:creationId xmlns:a16="http://schemas.microsoft.com/office/drawing/2014/main" id="{CEFF620F-2F69-B982-99C0-B7DF3894EBDC}"/>
+              </a:ext>
+            </a:extLst>
+          </p:cNvPr>
+          <p:cNvSpPr/>
+          <p:nvPr/>
+        </p:nvSpPr>
+        <p:spPr>
+          <a:xfrm>
+            <a:off x="841248" y="566928"/>
+            <a:ext cx="7315200" cy="274320"/>
+          </a:xfrm>
+          <a:prstGeom prst="rect">
+            <a:avLst/>
+          </a:prstGeom>
+          <a:noFill/>
+          <a:ln/>
+        </p:spPr>
+        <p:txBody>
+          <a:bodyPr wrap="square" lIns="0" tIns="0" rIns="0" bIns="0" rtlCol="0" anchor="ctr"/>
+          <a:lstStyle/>
+          <a:p>
+            <a:pPr marL="0" indent="0">
+              <a:buNone/>
+            </a:pPr>
+            <a:r>
+              <a:rPr lang="en-US" sz="1100" b="1" kern="0" spc="300" dirty="0">
+                <a:solidFill>
+                  <a:srgbClr val="5B95FF"/>
+                </a:solidFill>
+                <a:latin typeface="Calibri" pitchFamily="34" charset="0"/>
+                <a:ea typeface="Calibri" pitchFamily="34" charset="-122"/>
+                <a:cs typeface="Calibri" pitchFamily="34" charset="-120"/>
+              </a:rPr>
+              <a:t>MEET THE TEAM</a:t>
+            </a:r>
+            <a:endParaRPr lang="en-US" sz="1100" dirty="0"/>
+          </a:p>
+        </p:txBody>
+      </p:sp>
+      <p:sp>
+        <p:nvSpPr>
+          <p:cNvPr id="3" name="Text 1">
+            <a:extLst>
+              <a:ext uri="{FF2B5EF4-FFF2-40B4-BE49-F238E27FC236}">
+                <a16:creationId xmlns:a16="http://schemas.microsoft.com/office/drawing/2014/main" id="{8D45AAC6-649A-D740-7339-1F2AE716E89A}"/>
+              </a:ext>
+            </a:extLst>
+          </p:cNvPr>
+          <p:cNvSpPr/>
+          <p:nvPr/>
+        </p:nvSpPr>
+        <p:spPr>
+          <a:xfrm>
+            <a:off x="822960" y="868680"/>
+            <a:ext cx="10698480" cy="777240"/>
+          </a:xfrm>
+          <a:prstGeom prst="rect">
+            <a:avLst/>
+          </a:prstGeom>
+          <a:noFill/>
+          <a:ln/>
+        </p:spPr>
+        <p:txBody>
+          <a:bodyPr wrap="square" lIns="0" tIns="0" rIns="0" bIns="0" rtlCol="0" anchor="ctr"/>
+          <a:lstStyle/>
+          <a:p>
+            <a:pPr marL="0" indent="0">
+              <a:buNone/>
+            </a:pPr>
+            <a:r>
+              <a:rPr lang="en-US" sz="3000" b="1" dirty="0">
+                <a:solidFill>
+                  <a:srgbClr val="F3F6FC"/>
+                </a:solidFill>
+                <a:latin typeface="Georgia" pitchFamily="34" charset="0"/>
+              </a:rPr>
+              <a:t>Our Team</a:t>
+            </a:r>
+            <a:endParaRPr lang="en-US" sz="3000" dirty="0"/>
+          </a:p>
+        </p:txBody>
+      </p:sp>
+      <p:sp>
+        <p:nvSpPr>
+          <p:cNvPr id="4" name="Text 2">
+            <a:extLst>
+              <a:ext uri="{FF2B5EF4-FFF2-40B4-BE49-F238E27FC236}">
+                <a16:creationId xmlns:a16="http://schemas.microsoft.com/office/drawing/2014/main" id="{2F116973-9EB5-45FD-352A-CE09D2BD2B4A}"/>
+              </a:ext>
+            </a:extLst>
+          </p:cNvPr>
+          <p:cNvSpPr/>
+          <p:nvPr/>
+        </p:nvSpPr>
+        <p:spPr>
+          <a:xfrm>
+            <a:off x="841248" y="1554480"/>
+            <a:ext cx="9875520" cy="457200"/>
+          </a:xfrm>
+          <a:prstGeom prst="rect">
+            <a:avLst/>
+          </a:prstGeom>
+          <a:noFill/>
+          <a:ln/>
+        </p:spPr>
+        <p:txBody>
+          <a:bodyPr wrap="square" lIns="0" tIns="0" rIns="0" bIns="0" rtlCol="0" anchor="ctr"/>
+          <a:lstStyle/>
+          <a:p>
+            <a:pPr marL="0" indent="0">
+              <a:buNone/>
+            </a:pPr>
+            <a:r>
+              <a:rPr lang="en-US" sz="1400" dirty="0">
+                <a:solidFill>
+                  <a:srgbClr val="C2CDE0"/>
+                </a:solidFill>
+                <a:latin typeface="Calibri" pitchFamily="34" charset="0"/>
+                <a:ea typeface="Calibri" pitchFamily="34" charset="-122"/>
+                <a:cs typeface="Calibri" pitchFamily="34" charset="-120"/>
+              </a:rPr>
+              <a:t>A passionate team of innovators building the future of AI-powered treasury management.</a:t>
+            </a:r>
+            <a:endParaRPr lang="en-US" sz="1400" dirty="0"/>
+          </a:p>
+        </p:txBody>
+      </p:sp>
+      <p:sp>
+        <p:nvSpPr>
+          <p:cNvPr id="5" name="Shape 3">
+            <a:extLst>
+              <a:ext uri="{FF2B5EF4-FFF2-40B4-BE49-F238E27FC236}">
+                <a16:creationId xmlns:a16="http://schemas.microsoft.com/office/drawing/2014/main" id="{0214D5A4-3401-4A02-E118-359C188F547F}"/>
+              </a:ext>
+            </a:extLst>
+          </p:cNvPr>
+          <p:cNvSpPr/>
+          <p:nvPr/>
+        </p:nvSpPr>
+        <p:spPr>
+          <a:xfrm>
+            <a:off x="1551165" y="2247779"/>
+            <a:ext cx="1993392" cy="2286000"/>
+          </a:xfrm>
+          <a:prstGeom prst="roundRect">
+            <a:avLst>
+              <a:gd name="adj" fmla="val 3670"/>
+            </a:avLst>
+          </a:prstGeom>
+          <a:solidFill>
+            <a:srgbClr val="101A30"/>
+          </a:solidFill>
+          <a:ln w="12700">
+            <a:solidFill>
+              <a:srgbClr val="243150"/>
+            </a:solidFill>
+            <a:prstDash val="solid"/>
+          </a:ln>
+        </p:spPr>
+        <p:txBody>
+          <a:bodyPr/>
+          <a:lstStyle/>
+          <a:p>
+            <a:endParaRPr lang="en-MY"/>
+          </a:p>
+        </p:txBody>
+      </p:sp>
+      <p:sp>
+        <p:nvSpPr>
+          <p:cNvPr id="6" name="Shape 4">
+            <a:extLst>
+              <a:ext uri="{FF2B5EF4-FFF2-40B4-BE49-F238E27FC236}">
+                <a16:creationId xmlns:a16="http://schemas.microsoft.com/office/drawing/2014/main" id="{56574AFF-2B41-0820-DCD3-10C4F8D9535A}"/>
+              </a:ext>
+            </a:extLst>
+          </p:cNvPr>
+          <p:cNvSpPr/>
+          <p:nvPr/>
+        </p:nvSpPr>
+        <p:spPr>
+          <a:xfrm>
+            <a:off x="1551165" y="2247779"/>
+            <a:ext cx="1993392" cy="64008"/>
+          </a:xfrm>
+          <a:prstGeom prst="rect">
+            <a:avLst/>
+          </a:prstGeom>
+          <a:solidFill>
+            <a:srgbClr val="5B95FF"/>
+          </a:solidFill>
+          <a:ln w="12700">
+            <a:solidFill>
+              <a:srgbClr val="5B95FF"/>
+            </a:solidFill>
+            <a:prstDash val="solid"/>
+          </a:ln>
+        </p:spPr>
+        <p:txBody>
+          <a:bodyPr/>
+          <a:lstStyle/>
+          <a:p>
+            <a:endParaRPr lang="en-MY"/>
+          </a:p>
+        </p:txBody>
+      </p:sp>
+      <p:sp>
+        <p:nvSpPr>
+          <p:cNvPr id="8" name="Text 6">
+            <a:extLst>
+              <a:ext uri="{FF2B5EF4-FFF2-40B4-BE49-F238E27FC236}">
+                <a16:creationId xmlns:a16="http://schemas.microsoft.com/office/drawing/2014/main" id="{33C6E0D6-4D2F-5634-3015-D1406930A5F0}"/>
+              </a:ext>
+            </a:extLst>
+          </p:cNvPr>
+          <p:cNvSpPr/>
+          <p:nvPr/>
+        </p:nvSpPr>
+        <p:spPr>
+          <a:xfrm>
+            <a:off x="1788909" y="2485523"/>
+            <a:ext cx="1536192" cy="1097280"/>
+          </a:xfrm>
+          <a:prstGeom prst="rect">
+            <a:avLst/>
+          </a:prstGeom>
+          <a:noFill/>
+          <a:ln/>
+        </p:spPr>
+        <p:txBody>
+          <a:bodyPr wrap="square" lIns="0" tIns="0" rIns="0" bIns="0" rtlCol="0" anchor="ctr"/>
+          <a:lstStyle/>
+          <a:p>
+            <a:pPr marL="0" indent="0">
+              <a:buNone/>
+            </a:pPr>
+            <a:endParaRPr lang="en-US" sz="1800" dirty="0"/>
+          </a:p>
+        </p:txBody>
+      </p:sp>
+      <p:sp>
+        <p:nvSpPr>
+          <p:cNvPr id="10" name="Shape 8">
+            <a:extLst>
+              <a:ext uri="{FF2B5EF4-FFF2-40B4-BE49-F238E27FC236}">
+                <a16:creationId xmlns:a16="http://schemas.microsoft.com/office/drawing/2014/main" id="{107E2420-A3F1-0D33-5D43-A4A49EDEE901}"/>
+              </a:ext>
+            </a:extLst>
+          </p:cNvPr>
+          <p:cNvSpPr/>
+          <p:nvPr/>
+        </p:nvSpPr>
+        <p:spPr>
+          <a:xfrm>
+            <a:off x="3709149" y="2247779"/>
+            <a:ext cx="1993392" cy="2286000"/>
+          </a:xfrm>
+          <a:prstGeom prst="roundRect">
+            <a:avLst>
+              <a:gd name="adj" fmla="val 3670"/>
+            </a:avLst>
+          </a:prstGeom>
+          <a:solidFill>
+            <a:srgbClr val="101A30"/>
+          </a:solidFill>
+          <a:ln w="12700">
+            <a:solidFill>
+              <a:srgbClr val="243150"/>
+            </a:solidFill>
+            <a:prstDash val="solid"/>
+          </a:ln>
+        </p:spPr>
+        <p:txBody>
+          <a:bodyPr/>
+          <a:lstStyle/>
+          <a:p>
+            <a:endParaRPr lang="en-MY"/>
+          </a:p>
+        </p:txBody>
+      </p:sp>
+      <p:sp>
+        <p:nvSpPr>
+          <p:cNvPr id="11" name="Shape 9">
+            <a:extLst>
+              <a:ext uri="{FF2B5EF4-FFF2-40B4-BE49-F238E27FC236}">
+                <a16:creationId xmlns:a16="http://schemas.microsoft.com/office/drawing/2014/main" id="{23D44A79-6498-8947-404F-07CBBBB838BE}"/>
+              </a:ext>
+            </a:extLst>
+          </p:cNvPr>
+          <p:cNvSpPr/>
+          <p:nvPr/>
+        </p:nvSpPr>
+        <p:spPr>
+          <a:xfrm>
+            <a:off x="3709149" y="2247779"/>
+            <a:ext cx="1993392" cy="64008"/>
+          </a:xfrm>
+          <a:prstGeom prst="rect">
+            <a:avLst/>
+          </a:prstGeom>
+          <a:solidFill>
+            <a:srgbClr val="5B95FF"/>
+          </a:solidFill>
+          <a:ln w="12700">
+            <a:solidFill>
+              <a:srgbClr val="5B95FF"/>
+            </a:solidFill>
+            <a:prstDash val="solid"/>
+          </a:ln>
+        </p:spPr>
+        <p:txBody>
+          <a:bodyPr/>
+          <a:lstStyle/>
+          <a:p>
+            <a:endParaRPr lang="en-MY"/>
+          </a:p>
+        </p:txBody>
+      </p:sp>
+      <p:sp>
+        <p:nvSpPr>
+          <p:cNvPr id="15" name="Shape 13">
+            <a:extLst>
+              <a:ext uri="{FF2B5EF4-FFF2-40B4-BE49-F238E27FC236}">
+                <a16:creationId xmlns:a16="http://schemas.microsoft.com/office/drawing/2014/main" id="{2529623E-945C-766B-2DA2-502365091625}"/>
+              </a:ext>
+            </a:extLst>
+          </p:cNvPr>
+          <p:cNvSpPr/>
+          <p:nvPr/>
+        </p:nvSpPr>
+        <p:spPr>
+          <a:xfrm>
+            <a:off x="5867133" y="2247779"/>
+            <a:ext cx="1993392" cy="2286000"/>
+          </a:xfrm>
+          <a:prstGeom prst="roundRect">
+            <a:avLst>
+              <a:gd name="adj" fmla="val 3670"/>
+            </a:avLst>
+          </a:prstGeom>
+          <a:solidFill>
+            <a:srgbClr val="101A30"/>
+          </a:solidFill>
+          <a:ln w="12700">
+            <a:solidFill>
+              <a:srgbClr val="243150"/>
+            </a:solidFill>
+            <a:prstDash val="solid"/>
+          </a:ln>
+        </p:spPr>
+        <p:txBody>
+          <a:bodyPr/>
+          <a:lstStyle/>
+          <a:p>
+            <a:endParaRPr lang="en-MY"/>
+          </a:p>
+        </p:txBody>
+      </p:sp>
+      <p:sp>
+        <p:nvSpPr>
+          <p:cNvPr id="16" name="Shape 14">
+            <a:extLst>
+              <a:ext uri="{FF2B5EF4-FFF2-40B4-BE49-F238E27FC236}">
+                <a16:creationId xmlns:a16="http://schemas.microsoft.com/office/drawing/2014/main" id="{39A9F503-8BAE-3C9B-59E3-9745ABD43112}"/>
+              </a:ext>
+            </a:extLst>
+          </p:cNvPr>
+          <p:cNvSpPr/>
+          <p:nvPr/>
+        </p:nvSpPr>
+        <p:spPr>
+          <a:xfrm>
+            <a:off x="5867133" y="2247779"/>
+            <a:ext cx="1993392" cy="64008"/>
+          </a:xfrm>
+          <a:prstGeom prst="rect">
+            <a:avLst/>
+          </a:prstGeom>
+          <a:solidFill>
+            <a:srgbClr val="4FD0E0"/>
+          </a:solidFill>
+          <a:ln w="12700">
+            <a:solidFill>
+              <a:srgbClr val="4FD0E0"/>
+            </a:solidFill>
+            <a:prstDash val="solid"/>
+          </a:ln>
+        </p:spPr>
+        <p:txBody>
+          <a:bodyPr/>
+          <a:lstStyle/>
+          <a:p>
+            <a:endParaRPr lang="en-MY"/>
+          </a:p>
+        </p:txBody>
+      </p:sp>
+      <p:sp>
+        <p:nvSpPr>
+          <p:cNvPr id="20" name="Shape 18">
+            <a:extLst>
+              <a:ext uri="{FF2B5EF4-FFF2-40B4-BE49-F238E27FC236}">
+                <a16:creationId xmlns:a16="http://schemas.microsoft.com/office/drawing/2014/main" id="{BC766ADD-02E8-7D3C-55AA-A905B5C6AB59}"/>
+              </a:ext>
+            </a:extLst>
+          </p:cNvPr>
+          <p:cNvSpPr/>
+          <p:nvPr/>
+        </p:nvSpPr>
+        <p:spPr>
+          <a:xfrm>
+            <a:off x="8025117" y="2247779"/>
+            <a:ext cx="1993392" cy="2286000"/>
+          </a:xfrm>
+          <a:prstGeom prst="roundRect">
+            <a:avLst>
+              <a:gd name="adj" fmla="val 3670"/>
+            </a:avLst>
+          </a:prstGeom>
+          <a:solidFill>
+            <a:srgbClr val="101A30"/>
+          </a:solidFill>
+          <a:ln w="12700">
+            <a:solidFill>
+              <a:srgbClr val="243150"/>
+            </a:solidFill>
+            <a:prstDash val="solid"/>
+          </a:ln>
+        </p:spPr>
+        <p:txBody>
+          <a:bodyPr/>
+          <a:lstStyle/>
+          <a:p>
+            <a:endParaRPr lang="en-MY"/>
+          </a:p>
+        </p:txBody>
+      </p:sp>
+      <p:sp>
+        <p:nvSpPr>
+          <p:cNvPr id="21" name="Shape 19">
+            <a:extLst>
+              <a:ext uri="{FF2B5EF4-FFF2-40B4-BE49-F238E27FC236}">
+                <a16:creationId xmlns:a16="http://schemas.microsoft.com/office/drawing/2014/main" id="{FCB6F3AC-82B5-9D1F-1A77-962DD2488D26}"/>
+              </a:ext>
+            </a:extLst>
+          </p:cNvPr>
+          <p:cNvSpPr/>
+          <p:nvPr/>
+        </p:nvSpPr>
+        <p:spPr>
+          <a:xfrm>
+            <a:off x="8025117" y="2247779"/>
+            <a:ext cx="1993392" cy="64008"/>
+          </a:xfrm>
+          <a:prstGeom prst="rect">
+            <a:avLst/>
+          </a:prstGeom>
+          <a:solidFill>
+            <a:srgbClr val="35C98A"/>
+          </a:solidFill>
+          <a:ln w="12700">
+            <a:solidFill>
+              <a:srgbClr val="35C98A"/>
+            </a:solidFill>
+            <a:prstDash val="solid"/>
+          </a:ln>
+        </p:spPr>
+        <p:txBody>
+          <a:bodyPr/>
+          <a:lstStyle/>
+          <a:p>
+            <a:endParaRPr lang="en-MY"/>
+          </a:p>
+        </p:txBody>
+      </p:sp>
+      <p:sp>
+        <p:nvSpPr>
+          <p:cNvPr id="32" name="Text 30">
+            <a:extLst>
+              <a:ext uri="{FF2B5EF4-FFF2-40B4-BE49-F238E27FC236}">
+                <a16:creationId xmlns:a16="http://schemas.microsoft.com/office/drawing/2014/main" id="{07AE952D-F85A-6DE1-E99E-84305AB5FFAF}"/>
+              </a:ext>
+            </a:extLst>
+          </p:cNvPr>
+          <p:cNvSpPr/>
+          <p:nvPr/>
+        </p:nvSpPr>
+        <p:spPr>
+          <a:xfrm>
+            <a:off x="11430000" y="6355080"/>
+            <a:ext cx="640080" cy="320040"/>
+          </a:xfrm>
+          <a:prstGeom prst="rect">
+            <a:avLst/>
+          </a:prstGeom>
+          <a:noFill/>
+          <a:ln/>
+        </p:spPr>
+        <p:txBody>
+          <a:bodyPr wrap="square" lIns="0" tIns="0" rIns="0" bIns="0" rtlCol="0" anchor="ctr"/>
+          <a:lstStyle/>
+          <a:p>
+            <a:pPr marL="0" indent="0" algn="r">
+              <a:buNone/>
+            </a:pPr>
+            <a:r>
+              <a:rPr lang="en-US" sz="1000" kern="0" spc="100" dirty="0">
+                <a:solidFill>
+                  <a:srgbClr val="6A7795"/>
+                </a:solidFill>
+                <a:latin typeface="Calibri" pitchFamily="34" charset="0"/>
+                <a:ea typeface="Calibri" pitchFamily="34" charset="-122"/>
+                <a:cs typeface="Calibri" pitchFamily="34" charset="-120"/>
+              </a:rPr>
+              <a:t>05</a:t>
+            </a:r>
+            <a:endParaRPr lang="en-US" sz="1000" dirty="0"/>
+          </a:p>
+        </p:txBody>
+      </p:sp>
+      <p:pic>
+        <p:nvPicPr>
+          <p:cNvPr id="34" name="Picture 33">
+            <a:extLst>
+              <a:ext uri="{FF2B5EF4-FFF2-40B4-BE49-F238E27FC236}">
+                <a16:creationId xmlns:a16="http://schemas.microsoft.com/office/drawing/2014/main" id="{3390D0DC-8E30-E1F2-3407-E8265FCA0959}"/>
+              </a:ext>
+            </a:extLst>
+          </p:cNvPr>
+          <p:cNvPicPr>
+            <a:picLocks noChangeAspect="1"/>
+          </p:cNvPicPr>
+          <p:nvPr/>
+        </p:nvPicPr>
+        <p:blipFill>
+          <a:blip r:embed="rId3"/>
+          <a:stretch>
+            <a:fillRect/>
+          </a:stretch>
+        </p:blipFill>
+        <p:spPr>
+          <a:xfrm>
+            <a:off x="6218777" y="2447576"/>
+            <a:ext cx="1283475" cy="2043343"/>
+          </a:xfrm>
+          <a:prstGeom prst="rect">
+            <a:avLst/>
+          </a:prstGeom>
+        </p:spPr>
+      </p:pic>
+      <p:pic>
+        <p:nvPicPr>
+          <p:cNvPr id="36" name="Picture 35">
+            <a:extLst>
+              <a:ext uri="{FF2B5EF4-FFF2-40B4-BE49-F238E27FC236}">
+                <a16:creationId xmlns:a16="http://schemas.microsoft.com/office/drawing/2014/main" id="{60A28197-2E86-4F8E-4420-A730DCDEB88D}"/>
+              </a:ext>
+            </a:extLst>
+          </p:cNvPr>
+          <p:cNvPicPr>
+            <a:picLocks noChangeAspect="1"/>
+          </p:cNvPicPr>
+          <p:nvPr/>
+        </p:nvPicPr>
+        <p:blipFill>
+          <a:blip r:embed="rId4"/>
+          <a:stretch>
+            <a:fillRect/>
+          </a:stretch>
+        </p:blipFill>
+        <p:spPr>
+          <a:xfrm>
+            <a:off x="3932776" y="2447577"/>
+            <a:ext cx="1532508" cy="2043343"/>
+          </a:xfrm>
+          <a:prstGeom prst="rect">
+            <a:avLst/>
+          </a:prstGeom>
+        </p:spPr>
+      </p:pic>
+      <p:pic>
+        <p:nvPicPr>
+          <p:cNvPr id="43" name="Picture 42">
+            <a:extLst>
+              <a:ext uri="{FF2B5EF4-FFF2-40B4-BE49-F238E27FC236}">
+                <a16:creationId xmlns:a16="http://schemas.microsoft.com/office/drawing/2014/main" id="{BA87909B-C18C-7376-DA78-48B62DA0EF03}"/>
+              </a:ext>
+            </a:extLst>
+          </p:cNvPr>
+          <p:cNvPicPr>
+            <a:picLocks noChangeAspect="1"/>
+          </p:cNvPicPr>
+          <p:nvPr/>
+        </p:nvPicPr>
+        <p:blipFill>
+          <a:blip r:embed="rId5"/>
+          <a:stretch>
+            <a:fillRect/>
+          </a:stretch>
+        </p:blipFill>
+        <p:spPr>
+          <a:xfrm>
+            <a:off x="8258927" y="2447576"/>
+            <a:ext cx="1589267" cy="2043343"/>
+          </a:xfrm>
+          <a:prstGeom prst="rect">
+            <a:avLst/>
+          </a:prstGeom>
+        </p:spPr>
+      </p:pic>
+      <p:pic>
+        <p:nvPicPr>
+          <p:cNvPr id="47" name="Picture 46">
+            <a:extLst>
+              <a:ext uri="{FF2B5EF4-FFF2-40B4-BE49-F238E27FC236}">
+                <a16:creationId xmlns:a16="http://schemas.microsoft.com/office/drawing/2014/main" id="{7171C5E8-E0BA-50F0-C96C-E4387E9BF20D}"/>
+              </a:ext>
+            </a:extLst>
+          </p:cNvPr>
+          <p:cNvPicPr>
+            <a:picLocks noChangeAspect="1"/>
+          </p:cNvPicPr>
+          <p:nvPr/>
+        </p:nvPicPr>
+        <p:blipFill>
+          <a:blip r:embed="rId6"/>
+          <a:stretch>
+            <a:fillRect/>
+          </a:stretch>
+        </p:blipFill>
+        <p:spPr>
+          <a:xfrm>
+            <a:off x="1662832" y="2447577"/>
+            <a:ext cx="1809060" cy="2002261"/>
+          </a:xfrm>
+          <a:prstGeom prst="rect">
+            <a:avLst/>
+          </a:prstGeom>
+        </p:spPr>
+      </p:pic>
+      <p:sp>
+        <p:nvSpPr>
+          <p:cNvPr id="48" name="Shape 3">
+            <a:extLst>
+              <a:ext uri="{FF2B5EF4-FFF2-40B4-BE49-F238E27FC236}">
+                <a16:creationId xmlns:a16="http://schemas.microsoft.com/office/drawing/2014/main" id="{542CA4DE-4A93-2A85-6C67-CCC80B7C4BBD}"/>
+              </a:ext>
+            </a:extLst>
+          </p:cNvPr>
+          <p:cNvSpPr/>
+          <p:nvPr/>
+        </p:nvSpPr>
+        <p:spPr>
+          <a:xfrm>
+            <a:off x="8056864" y="4686179"/>
+            <a:ext cx="1993392" cy="240384"/>
+          </a:xfrm>
+          <a:prstGeom prst="roundRect">
+            <a:avLst>
+              <a:gd name="adj" fmla="val 3670"/>
+            </a:avLst>
+          </a:prstGeom>
+          <a:solidFill>
+            <a:srgbClr val="101A30"/>
+          </a:solidFill>
+          <a:ln w="12700">
+            <a:solidFill>
+              <a:srgbClr val="243150"/>
+            </a:solidFill>
+            <a:prstDash val="solid"/>
+          </a:ln>
+        </p:spPr>
+        <p:txBody>
+          <a:bodyPr/>
+          <a:lstStyle/>
+          <a:p>
+            <a:r>
+              <a:rPr lang="en-MY" sz="1200" dirty="0">
+                <a:solidFill>
+                  <a:schemeClr val="bg1"/>
+                </a:solidFill>
+              </a:rPr>
+              <a:t>Project Lead | AI Strategy</a:t>
+            </a:r>
+            <a:endParaRPr lang="en-MY" sz="1200" dirty="0"/>
+          </a:p>
+        </p:txBody>
+      </p:sp>
+      <p:sp>
+        <p:nvSpPr>
+          <p:cNvPr id="50" name="Shape 3">
+            <a:extLst>
+              <a:ext uri="{FF2B5EF4-FFF2-40B4-BE49-F238E27FC236}">
+                <a16:creationId xmlns:a16="http://schemas.microsoft.com/office/drawing/2014/main" id="{3C433376-55B9-FE3D-D61A-71B530B49824}"/>
+              </a:ext>
+            </a:extLst>
+          </p:cNvPr>
+          <p:cNvSpPr/>
+          <p:nvPr/>
+        </p:nvSpPr>
+        <p:spPr>
+          <a:xfrm>
+            <a:off x="5867133" y="4686179"/>
+            <a:ext cx="1993392" cy="240384"/>
+          </a:xfrm>
+          <a:prstGeom prst="roundRect">
+            <a:avLst>
+              <a:gd name="adj" fmla="val 3670"/>
+            </a:avLst>
+          </a:prstGeom>
+          <a:solidFill>
+            <a:srgbClr val="101A30"/>
+          </a:solidFill>
+          <a:ln w="12700">
+            <a:solidFill>
+              <a:srgbClr val="243150"/>
+            </a:solidFill>
+            <a:prstDash val="solid"/>
+          </a:ln>
+        </p:spPr>
+        <p:txBody>
+          <a:bodyPr/>
+          <a:lstStyle/>
+          <a:p>
+            <a:pPr algn="ctr"/>
+            <a:r>
+              <a:rPr lang="en-MY" sz="1200" dirty="0">
+                <a:solidFill>
+                  <a:schemeClr val="bg1"/>
+                </a:solidFill>
+              </a:rPr>
+              <a:t>AI Engineer</a:t>
+            </a:r>
+            <a:endParaRPr lang="en-MY" sz="1200" dirty="0"/>
+          </a:p>
+        </p:txBody>
+      </p:sp>
+      <p:sp>
+        <p:nvSpPr>
+          <p:cNvPr id="51" name="Shape 3">
+            <a:extLst>
+              <a:ext uri="{FF2B5EF4-FFF2-40B4-BE49-F238E27FC236}">
+                <a16:creationId xmlns:a16="http://schemas.microsoft.com/office/drawing/2014/main" id="{DA8E369C-7675-6BED-3607-F445AEFCBB82}"/>
+              </a:ext>
+            </a:extLst>
+          </p:cNvPr>
+          <p:cNvSpPr/>
+          <p:nvPr/>
+        </p:nvSpPr>
+        <p:spPr>
+          <a:xfrm>
+            <a:off x="3677402" y="4686179"/>
+            <a:ext cx="1993392" cy="240384"/>
+          </a:xfrm>
+          <a:prstGeom prst="roundRect">
+            <a:avLst>
+              <a:gd name="adj" fmla="val 3670"/>
+            </a:avLst>
+          </a:prstGeom>
+          <a:solidFill>
+            <a:srgbClr val="101A30"/>
+          </a:solidFill>
+          <a:ln w="12700">
+            <a:solidFill>
+              <a:srgbClr val="243150"/>
+            </a:solidFill>
+            <a:prstDash val="solid"/>
+          </a:ln>
+        </p:spPr>
+        <p:txBody>
+          <a:bodyPr/>
+          <a:lstStyle/>
+          <a:p>
+            <a:pPr algn="ctr"/>
+            <a:r>
+              <a:rPr lang="en-MY" sz="1200" dirty="0">
+                <a:solidFill>
+                  <a:schemeClr val="bg1"/>
+                </a:solidFill>
+              </a:rPr>
+              <a:t>Frontend Engineer</a:t>
+            </a:r>
+            <a:endParaRPr lang="en-MY" sz="1200" dirty="0"/>
+          </a:p>
+        </p:txBody>
+      </p:sp>
+      <p:sp>
+        <p:nvSpPr>
+          <p:cNvPr id="52" name="Shape 3">
+            <a:extLst>
+              <a:ext uri="{FF2B5EF4-FFF2-40B4-BE49-F238E27FC236}">
+                <a16:creationId xmlns:a16="http://schemas.microsoft.com/office/drawing/2014/main" id="{DD035FEF-820D-CD5C-FF51-2C21FC961A5D}"/>
+              </a:ext>
+            </a:extLst>
+          </p:cNvPr>
+          <p:cNvSpPr/>
+          <p:nvPr/>
+        </p:nvSpPr>
+        <p:spPr>
+          <a:xfrm>
+            <a:off x="1551165" y="4669569"/>
+            <a:ext cx="1993392" cy="240384"/>
+          </a:xfrm>
+          <a:prstGeom prst="roundRect">
+            <a:avLst>
+              <a:gd name="adj" fmla="val 3670"/>
+            </a:avLst>
+          </a:prstGeom>
+          <a:solidFill>
+            <a:srgbClr val="101A30"/>
+          </a:solidFill>
+          <a:ln w="12700">
+            <a:solidFill>
+              <a:srgbClr val="243150"/>
+            </a:solidFill>
+            <a:prstDash val="solid"/>
+          </a:ln>
+        </p:spPr>
+        <p:txBody>
+          <a:bodyPr/>
+          <a:lstStyle/>
+          <a:p>
+            <a:pPr algn="ctr"/>
+            <a:r>
+              <a:rPr lang="en-MY" sz="1200" dirty="0">
+                <a:solidFill>
+                  <a:schemeClr val="bg1"/>
+                </a:solidFill>
+              </a:rPr>
+              <a:t>Infrastructure Engineer</a:t>
+            </a:r>
+            <a:endParaRPr lang="en-MY" sz="1200" dirty="0"/>
+          </a:p>
+        </p:txBody>
+      </p:sp>
+    </p:spTree>
+    <p:extLst>
+      <p:ext uri="{BB962C8B-B14F-4D97-AF65-F5344CB8AC3E}">
+        <p14:creationId xmlns:p14="http://schemas.microsoft.com/office/powerpoint/2010/main" val="3434646834"/>
+      </p:ext>
+    </p:extLst>
+  </p:cSld>
+  <p:clrMapOvr>
+    <a:masterClrMapping/>
+  </p:clrMapOvr>
+</p:sld>
+</file>
+
+<file path=ppt/slides/slide3.xml><?xml version="1.0" encoding="utf-8"?>
+<p:sld xmlns:a="http://schemas.openxmlformats.org/drawingml/2006/main" xmlns:r="http://schemas.openxmlformats.org/officeDocument/2006/relationships" xmlns:p="http://schemas.openxmlformats.org/presentationml/2006/main">
   <p:cSld name="Slide 2">
     <p:bg>
       <p:bgPr>
@@ -4467,7 +5698,7 @@
 </p:sld>
 </file>
 
-<file path=ppt/slides/slide3.xml><?xml version="1.0" encoding="utf-8"?>
+<file path=ppt/slides/slide4.xml><?xml version="1.0" encoding="utf-8"?>
 <p:sld xmlns:a="http://schemas.openxmlformats.org/drawingml/2006/main" xmlns:r="http://schemas.openxmlformats.org/officeDocument/2006/relationships" xmlns:p="http://schemas.openxmlformats.org/presentationml/2006/main">
   <p:cSld name="Slide 3">
     <p:bg>
@@ -5664,7 +6895,7 @@
 </p:sld>
 </file>
 
-<file path=ppt/slides/slide4.xml><?xml version="1.0" encoding="utf-8"?>
+<file path=ppt/slides/slide5.xml><?xml version="1.0" encoding="utf-8"?>
 <p:sld xmlns:a="http://schemas.openxmlformats.org/drawingml/2006/main" xmlns:r="http://schemas.openxmlformats.org/officeDocument/2006/relationships" xmlns:p="http://schemas.openxmlformats.org/presentationml/2006/main">
   <p:cSld name="Slide 4">
     <p:bg>
@@ -7070,7 +8301,7 @@
 </p:sld>
 </file>
 
-<file path=ppt/slides/slide5.xml><?xml version="1.0" encoding="utf-8"?>
+<file path=ppt/slides/slide6.xml><?xml version="1.0" encoding="utf-8"?>
 <p:sld xmlns:a="http://schemas.openxmlformats.org/drawingml/2006/main" xmlns:r="http://schemas.openxmlformats.org/officeDocument/2006/relationships" xmlns:p="http://schemas.openxmlformats.org/presentationml/2006/main">
   <p:cSld name="Slide 5">
     <p:bg>
@@ -8276,7 +9507,7 @@
 </p:sld>
 </file>
 
-<file path=ppt/slides/slide6.xml><?xml version="1.0" encoding="utf-8"?>
+<file path=ppt/slides/slide7.xml><?xml version="1.0" encoding="utf-8"?>
 <p:sld xmlns:a="http://schemas.openxmlformats.org/drawingml/2006/main" xmlns:r="http://schemas.openxmlformats.org/officeDocument/2006/relationships" xmlns:p="http://schemas.openxmlformats.org/presentationml/2006/main">
   <p:cSld name="Slide 6">
     <p:bg>
@@ -9353,7 +10584,7 @@
 </p:sld>
 </file>
 
-<file path=ppt/slides/slide7.xml><?xml version="1.0" encoding="utf-8"?>
+<file path=ppt/slides/slide8.xml><?xml version="1.0" encoding="utf-8"?>
 <p:sld xmlns:a="http://schemas.openxmlformats.org/drawingml/2006/main" xmlns:r="http://schemas.openxmlformats.org/officeDocument/2006/relationships" xmlns:p="http://schemas.openxmlformats.org/presentationml/2006/main">
   <p:cSld name="Slide 7">
     <p:bg>
@@ -10457,7 +11688,7 @@
 </p:sld>
 </file>
 
-<file path=ppt/slides/slide8.xml><?xml version="1.0" encoding="utf-8"?>
+<file path=ppt/slides/slide9.xml><?xml version="1.0" encoding="utf-8"?>
 <p:sld xmlns:a="http://schemas.openxmlformats.org/drawingml/2006/main" xmlns:r="http://schemas.openxmlformats.org/officeDocument/2006/relationships" xmlns:p="http://schemas.openxmlformats.org/presentationml/2006/main">
   <p:cSld name="Slide 8">
     <p:bg>
@@ -11356,1362 +12587,6 @@
                 <a:cs typeface="Calibri" pitchFamily="34" charset="-120"/>
               </a:rPr>
               <a:t>08</a:t>
-            </a:r>
-            <a:endParaRPr lang="en-US" sz="1000" dirty="0"/>
-          </a:p>
-        </p:txBody>
-      </p:sp>
-    </p:spTree>
-  </p:cSld>
-  <p:clrMapOvr>
-    <a:masterClrMapping/>
-  </p:clrMapOvr>
-</p:sld>
-</file>
-
-<file path=ppt/slides/slide9.xml><?xml version="1.0" encoding="utf-8"?>
-<p:sld xmlns:a="http://schemas.openxmlformats.org/drawingml/2006/main" xmlns:r="http://schemas.openxmlformats.org/officeDocument/2006/relationships" xmlns:p="http://schemas.openxmlformats.org/presentationml/2006/main">
-  <p:cSld name="Slide 9">
-    <p:bg>
-      <p:bgPr>
-        <a:solidFill>
-          <a:srgbClr val="070B14"/>
-        </a:solidFill>
-        <a:effectLst/>
-      </p:bgPr>
-    </p:bg>
-    <p:spTree>
-      <p:nvGrpSpPr>
-        <p:cNvPr id="1" name=""/>
-        <p:cNvGrpSpPr/>
-        <p:nvPr/>
-      </p:nvGrpSpPr>
-      <p:grpSpPr>
-        <a:xfrm>
-          <a:off x="0" y="0"/>
-          <a:ext cx="0" cy="0"/>
-          <a:chOff x="0" y="0"/>
-          <a:chExt cx="0" cy="0"/>
-        </a:xfrm>
-      </p:grpSpPr>
-      <p:sp>
-        <p:nvSpPr>
-          <p:cNvPr id="2" name="Text 0"/>
-          <p:cNvSpPr/>
-          <p:nvPr/>
-        </p:nvSpPr>
-        <p:spPr>
-          <a:xfrm>
-            <a:off x="841248" y="566928"/>
-            <a:ext cx="7315200" cy="274320"/>
-          </a:xfrm>
-          <a:prstGeom prst="rect">
-            <a:avLst/>
-          </a:prstGeom>
-          <a:noFill/>
-          <a:ln/>
-        </p:spPr>
-        <p:txBody>
-          <a:bodyPr wrap="square" lIns="0" tIns="0" rIns="0" bIns="0" rtlCol="0" anchor="ctr"/>
-          <a:lstStyle/>
-          <a:p>
-            <a:pPr marL="0" indent="0">
-              <a:buNone/>
-            </a:pPr>
-            <a:r>
-              <a:rPr lang="en-US" sz="1100" b="1" kern="0" spc="300" dirty="0">
-                <a:solidFill>
-                  <a:srgbClr val="5B95FF"/>
-                </a:solidFill>
-                <a:latin typeface="Calibri" pitchFamily="34" charset="0"/>
-                <a:ea typeface="Calibri" pitchFamily="34" charset="-122"/>
-                <a:cs typeface="Calibri" pitchFamily="34" charset="-120"/>
-              </a:rPr>
-              <a:t>FRAUD DETECTION &amp; REPORTING</a:t>
-            </a:r>
-            <a:endParaRPr lang="en-US" sz="1100" dirty="0"/>
-          </a:p>
-        </p:txBody>
-      </p:sp>
-      <p:sp>
-        <p:nvSpPr>
-          <p:cNvPr id="3" name="Text 1"/>
-          <p:cNvSpPr/>
-          <p:nvPr/>
-        </p:nvSpPr>
-        <p:spPr>
-          <a:xfrm>
-            <a:off x="822960" y="868680"/>
-            <a:ext cx="10698480" cy="777240"/>
-          </a:xfrm>
-          <a:prstGeom prst="rect">
-            <a:avLst/>
-          </a:prstGeom>
-          <a:noFill/>
-          <a:ln/>
-        </p:spPr>
-        <p:txBody>
-          <a:bodyPr wrap="square" lIns="0" tIns="0" rIns="0" bIns="0" rtlCol="0" anchor="ctr"/>
-          <a:lstStyle/>
-          <a:p>
-            <a:pPr marL="0" indent="0">
-              <a:buNone/>
-            </a:pPr>
-            <a:r>
-              <a:rPr lang="en-US" sz="3000" b="1" dirty="0">
-                <a:solidFill>
-                  <a:srgbClr val="F3F6FC"/>
-                </a:solidFill>
-                <a:latin typeface="Georgia" pitchFamily="34" charset="0"/>
-                <a:ea typeface="Georgia" pitchFamily="34" charset="-122"/>
-                <a:cs typeface="Georgia" pitchFamily="34" charset="-120"/>
-              </a:rPr>
-              <a:t>Catches risk, proves the trail.</a:t>
-            </a:r>
-            <a:endParaRPr lang="en-US" sz="3000" dirty="0"/>
-          </a:p>
-        </p:txBody>
-      </p:sp>
-      <p:sp>
-        <p:nvSpPr>
-          <p:cNvPr id="4" name="Shape 2"/>
-          <p:cNvSpPr/>
-          <p:nvPr/>
-        </p:nvSpPr>
-        <p:spPr>
-          <a:xfrm>
-            <a:off x="841248" y="1828800"/>
-            <a:ext cx="5120640" cy="4023360"/>
-          </a:xfrm>
-          <a:prstGeom prst="roundRect">
-            <a:avLst>
-              <a:gd name="adj" fmla="val 1818"/>
-            </a:avLst>
-          </a:prstGeom>
-          <a:solidFill>
-            <a:srgbClr val="101A30"/>
-          </a:solidFill>
-          <a:ln w="12700">
-            <a:solidFill>
-              <a:srgbClr val="243150"/>
-            </a:solidFill>
-            <a:prstDash val="solid"/>
-          </a:ln>
-        </p:spPr>
-        <p:txBody>
-          <a:bodyPr/>
-          <a:lstStyle/>
-          <a:p>
-            <a:endParaRPr lang="en-MY"/>
-          </a:p>
-        </p:txBody>
-      </p:sp>
-      <p:sp>
-        <p:nvSpPr>
-          <p:cNvPr id="5" name="Text 3"/>
-          <p:cNvSpPr/>
-          <p:nvPr/>
-        </p:nvSpPr>
-        <p:spPr>
-          <a:xfrm>
-            <a:off x="1097280" y="2057400"/>
-            <a:ext cx="4572000" cy="274320"/>
-          </a:xfrm>
-          <a:prstGeom prst="rect">
-            <a:avLst/>
-          </a:prstGeom>
-          <a:noFill/>
-          <a:ln/>
-        </p:spPr>
-        <p:txBody>
-          <a:bodyPr wrap="square" lIns="0" tIns="0" rIns="0" bIns="0" rtlCol="0" anchor="ctr"/>
-          <a:lstStyle/>
-          <a:p>
-            <a:pPr marL="0" indent="0">
-              <a:buNone/>
-            </a:pPr>
-            <a:r>
-              <a:rPr lang="en-US" sz="1100" b="1" kern="0" spc="200" dirty="0">
-                <a:solidFill>
-                  <a:srgbClr val="E5823C"/>
-                </a:solidFill>
-                <a:latin typeface="Calibri" pitchFamily="34" charset="0"/>
-                <a:ea typeface="Calibri" pitchFamily="34" charset="-122"/>
-                <a:cs typeface="Calibri" pitchFamily="34" charset="-120"/>
-              </a:rPr>
-              <a:t>RULE-BASED FRAUD ENGINE</a:t>
-            </a:r>
-            <a:endParaRPr lang="en-US" sz="1100" dirty="0"/>
-          </a:p>
-        </p:txBody>
-      </p:sp>
-      <p:sp>
-        <p:nvSpPr>
-          <p:cNvPr id="6" name="Shape 4"/>
-          <p:cNvSpPr/>
-          <p:nvPr/>
-        </p:nvSpPr>
-        <p:spPr>
-          <a:xfrm>
-            <a:off x="1143000" y="2505456"/>
-            <a:ext cx="237744" cy="237744"/>
-          </a:xfrm>
-          <a:prstGeom prst="ellipse">
-            <a:avLst/>
-          </a:prstGeom>
-          <a:solidFill>
-            <a:srgbClr val="E5823C"/>
-          </a:solidFill>
-          <a:ln w="12700">
-            <a:solidFill>
-              <a:srgbClr val="E5823C"/>
-            </a:solidFill>
-            <a:prstDash val="solid"/>
-          </a:ln>
-        </p:spPr>
-        <p:txBody>
-          <a:bodyPr/>
-          <a:lstStyle/>
-          <a:p>
-            <a:endParaRPr lang="en-MY"/>
-          </a:p>
-        </p:txBody>
-      </p:sp>
-      <p:sp>
-        <p:nvSpPr>
-          <p:cNvPr id="7" name="Text 5"/>
-          <p:cNvSpPr/>
-          <p:nvPr/>
-        </p:nvSpPr>
-        <p:spPr>
-          <a:xfrm>
-            <a:off x="1508760" y="2414016"/>
-            <a:ext cx="4297680" cy="310896"/>
-          </a:xfrm>
-          <a:prstGeom prst="rect">
-            <a:avLst/>
-          </a:prstGeom>
-          <a:noFill/>
-          <a:ln/>
-        </p:spPr>
-        <p:txBody>
-          <a:bodyPr wrap="square" lIns="0" tIns="0" rIns="0" bIns="0" rtlCol="0" anchor="ctr"/>
-          <a:lstStyle/>
-          <a:p>
-            <a:pPr marL="0" indent="0">
-              <a:buNone/>
-            </a:pPr>
-            <a:r>
-              <a:rPr lang="en-US" sz="1300" b="1" dirty="0">
-                <a:solidFill>
-                  <a:srgbClr val="F3F6FC"/>
-                </a:solidFill>
-                <a:latin typeface="Calibri" pitchFamily="34" charset="0"/>
-                <a:ea typeface="Calibri" pitchFamily="34" charset="-122"/>
-                <a:cs typeface="Calibri" pitchFamily="34" charset="-120"/>
-              </a:rPr>
-              <a:t>Duplicate invoices</a:t>
-            </a:r>
-            <a:endParaRPr lang="en-US" sz="1300" dirty="0"/>
-          </a:p>
-        </p:txBody>
-      </p:sp>
-      <p:sp>
-        <p:nvSpPr>
-          <p:cNvPr id="8" name="Text 6"/>
-          <p:cNvSpPr/>
-          <p:nvPr/>
-        </p:nvSpPr>
-        <p:spPr>
-          <a:xfrm>
-            <a:off x="1508760" y="2706624"/>
-            <a:ext cx="4206240" cy="310896"/>
-          </a:xfrm>
-          <a:prstGeom prst="rect">
-            <a:avLst/>
-          </a:prstGeom>
-          <a:noFill/>
-          <a:ln/>
-        </p:spPr>
-        <p:txBody>
-          <a:bodyPr wrap="square" lIns="0" tIns="0" rIns="0" bIns="0" rtlCol="0" anchor="ctr"/>
-          <a:lstStyle/>
-          <a:p>
-            <a:pPr marL="0" indent="0">
-              <a:buNone/>
-            </a:pPr>
-            <a:r>
-              <a:rPr lang="en-US" sz="1050" dirty="0">
-                <a:solidFill>
-                  <a:srgbClr val="6A7795"/>
-                </a:solidFill>
-                <a:latin typeface="Calibri" pitchFamily="34" charset="0"/>
-                <a:ea typeface="Calibri" pitchFamily="34" charset="-122"/>
-                <a:cs typeface="Calibri" pitchFamily="34" charset="-120"/>
-              </a:rPr>
-              <a:t>Same vendor, amount and reference billed twice.</a:t>
-            </a:r>
-            <a:endParaRPr lang="en-US" sz="1050" dirty="0"/>
-          </a:p>
-        </p:txBody>
-      </p:sp>
-      <p:sp>
-        <p:nvSpPr>
-          <p:cNvPr id="9" name="Shape 7"/>
-          <p:cNvSpPr/>
-          <p:nvPr/>
-        </p:nvSpPr>
-        <p:spPr>
-          <a:xfrm>
-            <a:off x="1143000" y="3163824"/>
-            <a:ext cx="237744" cy="237744"/>
-          </a:xfrm>
-          <a:prstGeom prst="ellipse">
-            <a:avLst/>
-          </a:prstGeom>
-          <a:solidFill>
-            <a:srgbClr val="E5823C"/>
-          </a:solidFill>
-          <a:ln w="12700">
-            <a:solidFill>
-              <a:srgbClr val="E5823C"/>
-            </a:solidFill>
-            <a:prstDash val="solid"/>
-          </a:ln>
-        </p:spPr>
-        <p:txBody>
-          <a:bodyPr/>
-          <a:lstStyle/>
-          <a:p>
-            <a:endParaRPr lang="en-MY"/>
-          </a:p>
-        </p:txBody>
-      </p:sp>
-      <p:sp>
-        <p:nvSpPr>
-          <p:cNvPr id="10" name="Text 8"/>
-          <p:cNvSpPr/>
-          <p:nvPr/>
-        </p:nvSpPr>
-        <p:spPr>
-          <a:xfrm>
-            <a:off x="1508760" y="3072384"/>
-            <a:ext cx="4297680" cy="310896"/>
-          </a:xfrm>
-          <a:prstGeom prst="rect">
-            <a:avLst/>
-          </a:prstGeom>
-          <a:noFill/>
-          <a:ln/>
-        </p:spPr>
-        <p:txBody>
-          <a:bodyPr wrap="square" lIns="0" tIns="0" rIns="0" bIns="0" rtlCol="0" anchor="ctr"/>
-          <a:lstStyle/>
-          <a:p>
-            <a:pPr marL="0" indent="0">
-              <a:buNone/>
-            </a:pPr>
-            <a:r>
-              <a:rPr lang="en-US" sz="1300" b="1" dirty="0">
-                <a:solidFill>
-                  <a:srgbClr val="F3F6FC"/>
-                </a:solidFill>
-                <a:latin typeface="Calibri" pitchFamily="34" charset="0"/>
-                <a:ea typeface="Calibri" pitchFamily="34" charset="-122"/>
-                <a:cs typeface="Calibri" pitchFamily="34" charset="-120"/>
-              </a:rPr>
-              <a:t>Unknown merchants</a:t>
-            </a:r>
-            <a:endParaRPr lang="en-US" sz="1300" dirty="0"/>
-          </a:p>
-        </p:txBody>
-      </p:sp>
-      <p:sp>
-        <p:nvSpPr>
-          <p:cNvPr id="11" name="Text 9"/>
-          <p:cNvSpPr/>
-          <p:nvPr/>
-        </p:nvSpPr>
-        <p:spPr>
-          <a:xfrm>
-            <a:off x="1508760" y="3364992"/>
-            <a:ext cx="4206240" cy="310896"/>
-          </a:xfrm>
-          <a:prstGeom prst="rect">
-            <a:avLst/>
-          </a:prstGeom>
-          <a:noFill/>
-          <a:ln/>
-        </p:spPr>
-        <p:txBody>
-          <a:bodyPr wrap="square" lIns="0" tIns="0" rIns="0" bIns="0" rtlCol="0" anchor="ctr"/>
-          <a:lstStyle/>
-          <a:p>
-            <a:pPr marL="0" indent="0">
-              <a:buNone/>
-            </a:pPr>
-            <a:r>
-              <a:rPr lang="en-US" sz="1050" dirty="0">
-                <a:solidFill>
-                  <a:srgbClr val="6A7795"/>
-                </a:solidFill>
-                <a:latin typeface="Calibri" pitchFamily="34" charset="0"/>
-                <a:ea typeface="Calibri" pitchFamily="34" charset="-122"/>
-                <a:cs typeface="Calibri" pitchFamily="34" charset="-120"/>
-              </a:rPr>
-              <a:t>Outgoing payments with no matching invoice.</a:t>
-            </a:r>
-            <a:endParaRPr lang="en-US" sz="1050" dirty="0"/>
-          </a:p>
-        </p:txBody>
-      </p:sp>
-      <p:sp>
-        <p:nvSpPr>
-          <p:cNvPr id="12" name="Shape 10"/>
-          <p:cNvSpPr/>
-          <p:nvPr/>
-        </p:nvSpPr>
-        <p:spPr>
-          <a:xfrm>
-            <a:off x="1143000" y="3822192"/>
-            <a:ext cx="237744" cy="237744"/>
-          </a:xfrm>
-          <a:prstGeom prst="ellipse">
-            <a:avLst/>
-          </a:prstGeom>
-          <a:solidFill>
-            <a:srgbClr val="E5823C"/>
-          </a:solidFill>
-          <a:ln w="12700">
-            <a:solidFill>
-              <a:srgbClr val="E5823C"/>
-            </a:solidFill>
-            <a:prstDash val="solid"/>
-          </a:ln>
-        </p:spPr>
-        <p:txBody>
-          <a:bodyPr/>
-          <a:lstStyle/>
-          <a:p>
-            <a:endParaRPr lang="en-MY"/>
-          </a:p>
-        </p:txBody>
-      </p:sp>
-      <p:sp>
-        <p:nvSpPr>
-          <p:cNvPr id="13" name="Text 11"/>
-          <p:cNvSpPr/>
-          <p:nvPr/>
-        </p:nvSpPr>
-        <p:spPr>
-          <a:xfrm>
-            <a:off x="1508760" y="3730752"/>
-            <a:ext cx="4297680" cy="310896"/>
-          </a:xfrm>
-          <a:prstGeom prst="rect">
-            <a:avLst/>
-          </a:prstGeom>
-          <a:noFill/>
-          <a:ln/>
-        </p:spPr>
-        <p:txBody>
-          <a:bodyPr wrap="square" lIns="0" tIns="0" rIns="0" bIns="0" rtlCol="0" anchor="ctr"/>
-          <a:lstStyle/>
-          <a:p>
-            <a:pPr marL="0" indent="0">
-              <a:buNone/>
-            </a:pPr>
-            <a:r>
-              <a:rPr lang="en-US" sz="1300" b="1" dirty="0">
-                <a:solidFill>
-                  <a:srgbClr val="F3F6FC"/>
-                </a:solidFill>
-                <a:latin typeface="Calibri" pitchFamily="34" charset="0"/>
-                <a:ea typeface="Calibri" pitchFamily="34" charset="-122"/>
-                <a:cs typeface="Calibri" pitchFamily="34" charset="-120"/>
-              </a:rPr>
-              <a:t>Missing references</a:t>
-            </a:r>
-            <a:endParaRPr lang="en-US" sz="1300" dirty="0"/>
-          </a:p>
-        </p:txBody>
-      </p:sp>
-      <p:sp>
-        <p:nvSpPr>
-          <p:cNvPr id="14" name="Text 12"/>
-          <p:cNvSpPr/>
-          <p:nvPr/>
-        </p:nvSpPr>
-        <p:spPr>
-          <a:xfrm>
-            <a:off x="1508760" y="4023360"/>
-            <a:ext cx="4206240" cy="310896"/>
-          </a:xfrm>
-          <a:prstGeom prst="rect">
-            <a:avLst/>
-          </a:prstGeom>
-          <a:noFill/>
-          <a:ln/>
-        </p:spPr>
-        <p:txBody>
-          <a:bodyPr wrap="square" lIns="0" tIns="0" rIns="0" bIns="0" rtlCol="0" anchor="ctr"/>
-          <a:lstStyle/>
-          <a:p>
-            <a:pPr marL="0" indent="0">
-              <a:buNone/>
-            </a:pPr>
-            <a:r>
-              <a:rPr lang="en-US" sz="1050" dirty="0">
-                <a:solidFill>
-                  <a:srgbClr val="6A7795"/>
-                </a:solidFill>
-                <a:latin typeface="Calibri" pitchFamily="34" charset="0"/>
-                <a:ea typeface="Calibri" pitchFamily="34" charset="-122"/>
-                <a:cs typeface="Calibri" pitchFamily="34" charset="-120"/>
-              </a:rPr>
-              <a:t>Large payments with a weak audit trail.</a:t>
-            </a:r>
-            <a:endParaRPr lang="en-US" sz="1050" dirty="0"/>
-          </a:p>
-        </p:txBody>
-      </p:sp>
-      <p:sp>
-        <p:nvSpPr>
-          <p:cNvPr id="15" name="Shape 13"/>
-          <p:cNvSpPr/>
-          <p:nvPr/>
-        </p:nvSpPr>
-        <p:spPr>
-          <a:xfrm>
-            <a:off x="1143000" y="4480560"/>
-            <a:ext cx="237744" cy="237744"/>
-          </a:xfrm>
-          <a:prstGeom prst="ellipse">
-            <a:avLst/>
-          </a:prstGeom>
-          <a:solidFill>
-            <a:srgbClr val="E5823C"/>
-          </a:solidFill>
-          <a:ln w="12700">
-            <a:solidFill>
-              <a:srgbClr val="E5823C"/>
-            </a:solidFill>
-            <a:prstDash val="solid"/>
-          </a:ln>
-        </p:spPr>
-        <p:txBody>
-          <a:bodyPr/>
-          <a:lstStyle/>
-          <a:p>
-            <a:endParaRPr lang="en-MY"/>
-          </a:p>
-        </p:txBody>
-      </p:sp>
-      <p:sp>
-        <p:nvSpPr>
-          <p:cNvPr id="16" name="Text 14"/>
-          <p:cNvSpPr/>
-          <p:nvPr/>
-        </p:nvSpPr>
-        <p:spPr>
-          <a:xfrm>
-            <a:off x="1508760" y="4389120"/>
-            <a:ext cx="4297680" cy="310896"/>
-          </a:xfrm>
-          <a:prstGeom prst="rect">
-            <a:avLst/>
-          </a:prstGeom>
-          <a:noFill/>
-          <a:ln/>
-        </p:spPr>
-        <p:txBody>
-          <a:bodyPr wrap="square" lIns="0" tIns="0" rIns="0" bIns="0" rtlCol="0" anchor="ctr"/>
-          <a:lstStyle/>
-          <a:p>
-            <a:pPr marL="0" indent="0">
-              <a:buNone/>
-            </a:pPr>
-            <a:r>
-              <a:rPr lang="en-US" sz="1300" b="1" dirty="0">
-                <a:solidFill>
-                  <a:srgbClr val="F3F6FC"/>
-                </a:solidFill>
-                <a:latin typeface="Calibri" pitchFamily="34" charset="0"/>
-                <a:ea typeface="Calibri" pitchFamily="34" charset="-122"/>
-                <a:cs typeface="Calibri" pitchFamily="34" charset="-120"/>
-              </a:rPr>
-              <a:t>Abnormal amounts</a:t>
-            </a:r>
-            <a:endParaRPr lang="en-US" sz="1300" dirty="0"/>
-          </a:p>
-        </p:txBody>
-      </p:sp>
-      <p:sp>
-        <p:nvSpPr>
-          <p:cNvPr id="17" name="Text 15"/>
-          <p:cNvSpPr/>
-          <p:nvPr/>
-        </p:nvSpPr>
-        <p:spPr>
-          <a:xfrm>
-            <a:off x="1508760" y="4681728"/>
-            <a:ext cx="4206240" cy="310896"/>
-          </a:xfrm>
-          <a:prstGeom prst="rect">
-            <a:avLst/>
-          </a:prstGeom>
-          <a:noFill/>
-          <a:ln/>
-        </p:spPr>
-        <p:txBody>
-          <a:bodyPr wrap="square" lIns="0" tIns="0" rIns="0" bIns="0" rtlCol="0" anchor="ctr"/>
-          <a:lstStyle/>
-          <a:p>
-            <a:pPr marL="0" indent="0">
-              <a:buNone/>
-            </a:pPr>
-            <a:r>
-              <a:rPr lang="en-US" sz="1050" dirty="0">
-                <a:solidFill>
-                  <a:srgbClr val="6A7795"/>
-                </a:solidFill>
-                <a:latin typeface="Calibri" pitchFamily="34" charset="0"/>
-                <a:ea typeface="Calibri" pitchFamily="34" charset="-122"/>
-                <a:cs typeface="Calibri" pitchFamily="34" charset="-120"/>
-              </a:rPr>
-              <a:t>Statistical outliers far above the batch norm.</a:t>
-            </a:r>
-            <a:endParaRPr lang="en-US" sz="1050" dirty="0"/>
-          </a:p>
-        </p:txBody>
-      </p:sp>
-      <p:sp>
-        <p:nvSpPr>
-          <p:cNvPr id="18" name="Shape 16"/>
-          <p:cNvSpPr/>
-          <p:nvPr/>
-        </p:nvSpPr>
-        <p:spPr>
-          <a:xfrm>
-            <a:off x="1143000" y="5138928"/>
-            <a:ext cx="237744" cy="237744"/>
-          </a:xfrm>
-          <a:prstGeom prst="ellipse">
-            <a:avLst/>
-          </a:prstGeom>
-          <a:solidFill>
-            <a:srgbClr val="E5823C"/>
-          </a:solidFill>
-          <a:ln w="12700">
-            <a:solidFill>
-              <a:srgbClr val="E5823C"/>
-            </a:solidFill>
-            <a:prstDash val="solid"/>
-          </a:ln>
-        </p:spPr>
-        <p:txBody>
-          <a:bodyPr/>
-          <a:lstStyle/>
-          <a:p>
-            <a:endParaRPr lang="en-MY"/>
-          </a:p>
-        </p:txBody>
-      </p:sp>
-      <p:sp>
-        <p:nvSpPr>
-          <p:cNvPr id="19" name="Text 17"/>
-          <p:cNvSpPr/>
-          <p:nvPr/>
-        </p:nvSpPr>
-        <p:spPr>
-          <a:xfrm>
-            <a:off x="1508760" y="5047488"/>
-            <a:ext cx="4297680" cy="310896"/>
-          </a:xfrm>
-          <a:prstGeom prst="rect">
-            <a:avLst/>
-          </a:prstGeom>
-          <a:noFill/>
-          <a:ln/>
-        </p:spPr>
-        <p:txBody>
-          <a:bodyPr wrap="square" lIns="0" tIns="0" rIns="0" bIns="0" rtlCol="0" anchor="ctr"/>
-          <a:lstStyle/>
-          <a:p>
-            <a:pPr marL="0" indent="0">
-              <a:buNone/>
-            </a:pPr>
-            <a:r>
-              <a:rPr lang="en-US" sz="1300" b="1" dirty="0">
-                <a:solidFill>
-                  <a:srgbClr val="F3F6FC"/>
-                </a:solidFill>
-                <a:latin typeface="Calibri" pitchFamily="34" charset="0"/>
-                <a:ea typeface="Calibri" pitchFamily="34" charset="-122"/>
-                <a:cs typeface="Calibri" pitchFamily="34" charset="-120"/>
-              </a:rPr>
-              <a:t>Suspicious patterns</a:t>
-            </a:r>
-            <a:endParaRPr lang="en-US" sz="1300" dirty="0"/>
-          </a:p>
-        </p:txBody>
-      </p:sp>
-      <p:sp>
-        <p:nvSpPr>
-          <p:cNvPr id="20" name="Text 18"/>
-          <p:cNvSpPr/>
-          <p:nvPr/>
-        </p:nvSpPr>
-        <p:spPr>
-          <a:xfrm>
-            <a:off x="1508760" y="5340096"/>
-            <a:ext cx="4206240" cy="310896"/>
-          </a:xfrm>
-          <a:prstGeom prst="rect">
-            <a:avLst/>
-          </a:prstGeom>
-          <a:noFill/>
-          <a:ln/>
-        </p:spPr>
-        <p:txBody>
-          <a:bodyPr wrap="square" lIns="0" tIns="0" rIns="0" bIns="0" rtlCol="0" anchor="ctr"/>
-          <a:lstStyle/>
-          <a:p>
-            <a:pPr marL="0" indent="0">
-              <a:buNone/>
-            </a:pPr>
-            <a:r>
-              <a:rPr lang="en-US" sz="1050" dirty="0">
-                <a:solidFill>
-                  <a:srgbClr val="6A7795"/>
-                </a:solidFill>
-                <a:latin typeface="Calibri" pitchFamily="34" charset="0"/>
-                <a:ea typeface="Calibri" pitchFamily="34" charset="-122"/>
-                <a:cs typeface="Calibri" pitchFamily="34" charset="-120"/>
-              </a:rPr>
-              <a:t>Round-number transfers and vendor anomalies.</a:t>
-            </a:r>
-            <a:endParaRPr lang="en-US" sz="1050" dirty="0"/>
-          </a:p>
-        </p:txBody>
-      </p:sp>
-      <p:sp>
-        <p:nvSpPr>
-          <p:cNvPr id="21" name="Shape 19"/>
-          <p:cNvSpPr/>
-          <p:nvPr/>
-        </p:nvSpPr>
-        <p:spPr>
-          <a:xfrm>
-            <a:off x="6199632" y="1828800"/>
-            <a:ext cx="5120640" cy="4023360"/>
-          </a:xfrm>
-          <a:prstGeom prst="roundRect">
-            <a:avLst>
-              <a:gd name="adj" fmla="val 1818"/>
-            </a:avLst>
-          </a:prstGeom>
-          <a:solidFill>
-            <a:srgbClr val="101A30"/>
-          </a:solidFill>
-          <a:ln w="12700">
-            <a:solidFill>
-              <a:srgbClr val="243150"/>
-            </a:solidFill>
-            <a:prstDash val="solid"/>
-          </a:ln>
-        </p:spPr>
-        <p:txBody>
-          <a:bodyPr/>
-          <a:lstStyle/>
-          <a:p>
-            <a:endParaRPr lang="en-MY"/>
-          </a:p>
-        </p:txBody>
-      </p:sp>
-      <p:sp>
-        <p:nvSpPr>
-          <p:cNvPr id="22" name="Text 20"/>
-          <p:cNvSpPr/>
-          <p:nvPr/>
-        </p:nvSpPr>
-        <p:spPr>
-          <a:xfrm>
-            <a:off x="6455664" y="2057400"/>
-            <a:ext cx="4572000" cy="274320"/>
-          </a:xfrm>
-          <a:prstGeom prst="rect">
-            <a:avLst/>
-          </a:prstGeom>
-          <a:noFill/>
-          <a:ln/>
-        </p:spPr>
-        <p:txBody>
-          <a:bodyPr wrap="square" lIns="0" tIns="0" rIns="0" bIns="0" rtlCol="0" anchor="ctr"/>
-          <a:lstStyle/>
-          <a:p>
-            <a:pPr marL="0" indent="0">
-              <a:buNone/>
-            </a:pPr>
-            <a:r>
-              <a:rPr lang="en-US" sz="1100" b="1" kern="0" spc="200" dirty="0">
-                <a:solidFill>
-                  <a:srgbClr val="35C98A"/>
-                </a:solidFill>
-                <a:latin typeface="Calibri" pitchFamily="34" charset="0"/>
-                <a:ea typeface="Calibri" pitchFamily="34" charset="-122"/>
-                <a:cs typeface="Calibri" pitchFamily="34" charset="-120"/>
-              </a:rPr>
-              <a:t>ONE-CLICK AUDIT REPORT</a:t>
-            </a:r>
-            <a:endParaRPr lang="en-US" sz="1100" dirty="0"/>
-          </a:p>
-        </p:txBody>
-      </p:sp>
-      <p:sp>
-        <p:nvSpPr>
-          <p:cNvPr id="23" name="Text 21"/>
-          <p:cNvSpPr/>
-          <p:nvPr/>
-        </p:nvSpPr>
-        <p:spPr>
-          <a:xfrm>
-            <a:off x="6455664" y="2377440"/>
-            <a:ext cx="4572000" cy="640080"/>
-          </a:xfrm>
-          <a:prstGeom prst="rect">
-            <a:avLst/>
-          </a:prstGeom>
-          <a:noFill/>
-          <a:ln/>
-        </p:spPr>
-        <p:txBody>
-          <a:bodyPr wrap="square" lIns="0" tIns="0" rIns="0" bIns="0" rtlCol="0" anchor="ctr"/>
-          <a:lstStyle/>
-          <a:p>
-            <a:pPr marL="0" indent="0">
-              <a:lnSpc>
-                <a:spcPts val="1700"/>
-              </a:lnSpc>
-              <a:buNone/>
-            </a:pPr>
-            <a:r>
-              <a:rPr lang="en-US" sz="1250" dirty="0">
-                <a:solidFill>
-                  <a:srgbClr val="C2CDE0"/>
-                </a:solidFill>
-                <a:latin typeface="Calibri" pitchFamily="34" charset="0"/>
-                <a:ea typeface="Calibri" pitchFamily="34" charset="-122"/>
-                <a:cs typeface="Calibri" pitchFamily="34" charset="-120"/>
-              </a:rPr>
-              <a:t>Every scan exports a professional PDF audit report, ready to hand to an accountant or auditor.</a:t>
-            </a:r>
-            <a:endParaRPr lang="en-US" sz="1250" dirty="0"/>
-          </a:p>
-        </p:txBody>
-      </p:sp>
-      <p:sp>
-        <p:nvSpPr>
-          <p:cNvPr id="24" name="Text 22"/>
-          <p:cNvSpPr/>
-          <p:nvPr/>
-        </p:nvSpPr>
-        <p:spPr>
-          <a:xfrm>
-            <a:off x="6455664" y="3200400"/>
-            <a:ext cx="320040" cy="310896"/>
-          </a:xfrm>
-          <a:prstGeom prst="rect">
-            <a:avLst/>
-          </a:prstGeom>
-          <a:noFill/>
-          <a:ln/>
-        </p:spPr>
-        <p:txBody>
-          <a:bodyPr wrap="square" lIns="0" tIns="0" rIns="0" bIns="0" rtlCol="0" anchor="ctr"/>
-          <a:lstStyle/>
-          <a:p>
-            <a:pPr marL="0" indent="0">
-              <a:buNone/>
-            </a:pPr>
-            <a:r>
-              <a:rPr lang="en-US" sz="1300" b="1" dirty="0">
-                <a:solidFill>
-                  <a:srgbClr val="35C98A"/>
-                </a:solidFill>
-                <a:latin typeface="Calibri" pitchFamily="34" charset="0"/>
-                <a:ea typeface="Calibri" pitchFamily="34" charset="-122"/>
-                <a:cs typeface="Calibri" pitchFamily="34" charset="-120"/>
-              </a:rPr>
-              <a:t>✓</a:t>
-            </a:r>
-            <a:endParaRPr lang="en-US" sz="1300" dirty="0"/>
-          </a:p>
-        </p:txBody>
-      </p:sp>
-      <p:sp>
-        <p:nvSpPr>
-          <p:cNvPr id="25" name="Text 23"/>
-          <p:cNvSpPr/>
-          <p:nvPr/>
-        </p:nvSpPr>
-        <p:spPr>
-          <a:xfrm>
-            <a:off x="6784848" y="3200400"/>
-            <a:ext cx="4297680" cy="310896"/>
-          </a:xfrm>
-          <a:prstGeom prst="rect">
-            <a:avLst/>
-          </a:prstGeom>
-          <a:noFill/>
-          <a:ln/>
-        </p:spPr>
-        <p:txBody>
-          <a:bodyPr wrap="square" lIns="0" tIns="0" rIns="0" bIns="0" rtlCol="0" anchor="ctr"/>
-          <a:lstStyle/>
-          <a:p>
-            <a:pPr marL="0" indent="0">
-              <a:buNone/>
-            </a:pPr>
-            <a:r>
-              <a:rPr lang="en-US" sz="1250" dirty="0">
-                <a:solidFill>
-                  <a:srgbClr val="C2CDE0"/>
-                </a:solidFill>
-                <a:latin typeface="Calibri" pitchFamily="34" charset="0"/>
-                <a:ea typeface="Calibri" pitchFamily="34" charset="-122"/>
-                <a:cs typeface="Calibri" pitchFamily="34" charset="-120"/>
-              </a:rPr>
-              <a:t>Executive summary</a:t>
-            </a:r>
-            <a:endParaRPr lang="en-US" sz="1250" dirty="0"/>
-          </a:p>
-        </p:txBody>
-      </p:sp>
-      <p:sp>
-        <p:nvSpPr>
-          <p:cNvPr id="26" name="Text 24"/>
-          <p:cNvSpPr/>
-          <p:nvPr/>
-        </p:nvSpPr>
-        <p:spPr>
-          <a:xfrm>
-            <a:off x="6455664" y="3621024"/>
-            <a:ext cx="320040" cy="310896"/>
-          </a:xfrm>
-          <a:prstGeom prst="rect">
-            <a:avLst/>
-          </a:prstGeom>
-          <a:noFill/>
-          <a:ln/>
-        </p:spPr>
-        <p:txBody>
-          <a:bodyPr wrap="square" lIns="0" tIns="0" rIns="0" bIns="0" rtlCol="0" anchor="ctr"/>
-          <a:lstStyle/>
-          <a:p>
-            <a:pPr marL="0" indent="0">
-              <a:buNone/>
-            </a:pPr>
-            <a:r>
-              <a:rPr lang="en-US" sz="1300" b="1" dirty="0">
-                <a:solidFill>
-                  <a:srgbClr val="35C98A"/>
-                </a:solidFill>
-                <a:latin typeface="Calibri" pitchFamily="34" charset="0"/>
-                <a:ea typeface="Calibri" pitchFamily="34" charset="-122"/>
-                <a:cs typeface="Calibri" pitchFamily="34" charset="-120"/>
-              </a:rPr>
-              <a:t>✓</a:t>
-            </a:r>
-            <a:endParaRPr lang="en-US" sz="1300" dirty="0"/>
-          </a:p>
-        </p:txBody>
-      </p:sp>
-      <p:sp>
-        <p:nvSpPr>
-          <p:cNvPr id="27" name="Text 25"/>
-          <p:cNvSpPr/>
-          <p:nvPr/>
-        </p:nvSpPr>
-        <p:spPr>
-          <a:xfrm>
-            <a:off x="6784848" y="3621024"/>
-            <a:ext cx="4297680" cy="310896"/>
-          </a:xfrm>
-          <a:prstGeom prst="rect">
-            <a:avLst/>
-          </a:prstGeom>
-          <a:noFill/>
-          <a:ln/>
-        </p:spPr>
-        <p:txBody>
-          <a:bodyPr wrap="square" lIns="0" tIns="0" rIns="0" bIns="0" rtlCol="0" anchor="ctr"/>
-          <a:lstStyle/>
-          <a:p>
-            <a:pPr marL="0" indent="0">
-              <a:buNone/>
-            </a:pPr>
-            <a:r>
-              <a:rPr lang="en-US" sz="1250" dirty="0">
-                <a:solidFill>
-                  <a:srgbClr val="C2CDE0"/>
-                </a:solidFill>
-                <a:latin typeface="Calibri" pitchFamily="34" charset="0"/>
-                <a:ea typeface="Calibri" pitchFamily="34" charset="-122"/>
-                <a:cs typeface="Calibri" pitchFamily="34" charset="-120"/>
-              </a:rPr>
-              <a:t>Key reconciliation metrics</a:t>
-            </a:r>
-            <a:endParaRPr lang="en-US" sz="1250" dirty="0"/>
-          </a:p>
-        </p:txBody>
-      </p:sp>
-      <p:sp>
-        <p:nvSpPr>
-          <p:cNvPr id="28" name="Text 26"/>
-          <p:cNvSpPr/>
-          <p:nvPr/>
-        </p:nvSpPr>
-        <p:spPr>
-          <a:xfrm>
-            <a:off x="6455664" y="4041648"/>
-            <a:ext cx="320040" cy="310896"/>
-          </a:xfrm>
-          <a:prstGeom prst="rect">
-            <a:avLst/>
-          </a:prstGeom>
-          <a:noFill/>
-          <a:ln/>
-        </p:spPr>
-        <p:txBody>
-          <a:bodyPr wrap="square" lIns="0" tIns="0" rIns="0" bIns="0" rtlCol="0" anchor="ctr"/>
-          <a:lstStyle/>
-          <a:p>
-            <a:pPr marL="0" indent="0">
-              <a:buNone/>
-            </a:pPr>
-            <a:r>
-              <a:rPr lang="en-US" sz="1300" b="1" dirty="0">
-                <a:solidFill>
-                  <a:srgbClr val="35C98A"/>
-                </a:solidFill>
-                <a:latin typeface="Calibri" pitchFamily="34" charset="0"/>
-                <a:ea typeface="Calibri" pitchFamily="34" charset="-122"/>
-                <a:cs typeface="Calibri" pitchFamily="34" charset="-120"/>
-              </a:rPr>
-              <a:t>✓</a:t>
-            </a:r>
-            <a:endParaRPr lang="en-US" sz="1300" dirty="0"/>
-          </a:p>
-        </p:txBody>
-      </p:sp>
-      <p:sp>
-        <p:nvSpPr>
-          <p:cNvPr id="29" name="Text 27"/>
-          <p:cNvSpPr/>
-          <p:nvPr/>
-        </p:nvSpPr>
-        <p:spPr>
-          <a:xfrm>
-            <a:off x="6784848" y="4041648"/>
-            <a:ext cx="4297680" cy="310896"/>
-          </a:xfrm>
-          <a:prstGeom prst="rect">
-            <a:avLst/>
-          </a:prstGeom>
-          <a:noFill/>
-          <a:ln/>
-        </p:spPr>
-        <p:txBody>
-          <a:bodyPr wrap="square" lIns="0" tIns="0" rIns="0" bIns="0" rtlCol="0" anchor="ctr"/>
-          <a:lstStyle/>
-          <a:p>
-            <a:pPr marL="0" indent="0">
-              <a:buNone/>
-            </a:pPr>
-            <a:r>
-              <a:rPr lang="en-US" sz="1250" dirty="0">
-                <a:solidFill>
-                  <a:srgbClr val="C2CDE0"/>
-                </a:solidFill>
-                <a:latin typeface="Calibri" pitchFamily="34" charset="0"/>
-                <a:ea typeface="Calibri" pitchFamily="34" charset="-122"/>
-                <a:cs typeface="Calibri" pitchFamily="34" charset="-120"/>
-              </a:rPr>
-              <a:t>Per-invoice detail with AI notes</a:t>
-            </a:r>
-            <a:endParaRPr lang="en-US" sz="1250" dirty="0"/>
-          </a:p>
-        </p:txBody>
-      </p:sp>
-      <p:sp>
-        <p:nvSpPr>
-          <p:cNvPr id="30" name="Text 28"/>
-          <p:cNvSpPr/>
-          <p:nvPr/>
-        </p:nvSpPr>
-        <p:spPr>
-          <a:xfrm>
-            <a:off x="6455664" y="4462272"/>
-            <a:ext cx="320040" cy="310896"/>
-          </a:xfrm>
-          <a:prstGeom prst="rect">
-            <a:avLst/>
-          </a:prstGeom>
-          <a:noFill/>
-          <a:ln/>
-        </p:spPr>
-        <p:txBody>
-          <a:bodyPr wrap="square" lIns="0" tIns="0" rIns="0" bIns="0" rtlCol="0" anchor="ctr"/>
-          <a:lstStyle/>
-          <a:p>
-            <a:pPr marL="0" indent="0">
-              <a:buNone/>
-            </a:pPr>
-            <a:r>
-              <a:rPr lang="en-US" sz="1300" b="1" dirty="0">
-                <a:solidFill>
-                  <a:srgbClr val="35C98A"/>
-                </a:solidFill>
-                <a:latin typeface="Calibri" pitchFamily="34" charset="0"/>
-                <a:ea typeface="Calibri" pitchFamily="34" charset="-122"/>
-                <a:cs typeface="Calibri" pitchFamily="34" charset="-120"/>
-              </a:rPr>
-              <a:t>✓</a:t>
-            </a:r>
-            <a:endParaRPr lang="en-US" sz="1300" dirty="0"/>
-          </a:p>
-        </p:txBody>
-      </p:sp>
-      <p:sp>
-        <p:nvSpPr>
-          <p:cNvPr id="31" name="Text 29"/>
-          <p:cNvSpPr/>
-          <p:nvPr/>
-        </p:nvSpPr>
-        <p:spPr>
-          <a:xfrm>
-            <a:off x="6784848" y="4462272"/>
-            <a:ext cx="4297680" cy="310896"/>
-          </a:xfrm>
-          <a:prstGeom prst="rect">
-            <a:avLst/>
-          </a:prstGeom>
-          <a:noFill/>
-          <a:ln/>
-        </p:spPr>
-        <p:txBody>
-          <a:bodyPr wrap="square" lIns="0" tIns="0" rIns="0" bIns="0" rtlCol="0" anchor="ctr"/>
-          <a:lstStyle/>
-          <a:p>
-            <a:pPr marL="0" indent="0">
-              <a:buNone/>
-            </a:pPr>
-            <a:r>
-              <a:rPr lang="en-US" sz="1250" dirty="0">
-                <a:solidFill>
-                  <a:srgbClr val="C2CDE0"/>
-                </a:solidFill>
-                <a:latin typeface="Calibri" pitchFamily="34" charset="0"/>
-                <a:ea typeface="Calibri" pitchFamily="34" charset="-122"/>
-                <a:cs typeface="Calibri" pitchFamily="34" charset="-120"/>
-              </a:rPr>
-              <a:t>Anomaly &amp; risk log</a:t>
-            </a:r>
-            <a:endParaRPr lang="en-US" sz="1250" dirty="0"/>
-          </a:p>
-        </p:txBody>
-      </p:sp>
-      <p:sp>
-        <p:nvSpPr>
-          <p:cNvPr id="32" name="Text 30"/>
-          <p:cNvSpPr/>
-          <p:nvPr/>
-        </p:nvSpPr>
-        <p:spPr>
-          <a:xfrm>
-            <a:off x="6455664" y="4882896"/>
-            <a:ext cx="320040" cy="310896"/>
-          </a:xfrm>
-          <a:prstGeom prst="rect">
-            <a:avLst/>
-          </a:prstGeom>
-          <a:noFill/>
-          <a:ln/>
-        </p:spPr>
-        <p:txBody>
-          <a:bodyPr wrap="square" lIns="0" tIns="0" rIns="0" bIns="0" rtlCol="0" anchor="ctr"/>
-          <a:lstStyle/>
-          <a:p>
-            <a:pPr marL="0" indent="0">
-              <a:buNone/>
-            </a:pPr>
-            <a:r>
-              <a:rPr lang="en-US" sz="1300" b="1" dirty="0">
-                <a:solidFill>
-                  <a:srgbClr val="35C98A"/>
-                </a:solidFill>
-                <a:latin typeface="Calibri" pitchFamily="34" charset="0"/>
-                <a:ea typeface="Calibri" pitchFamily="34" charset="-122"/>
-                <a:cs typeface="Calibri" pitchFamily="34" charset="-120"/>
-              </a:rPr>
-              <a:t>✓</a:t>
-            </a:r>
-            <a:endParaRPr lang="en-US" sz="1300" dirty="0"/>
-          </a:p>
-        </p:txBody>
-      </p:sp>
-      <p:sp>
-        <p:nvSpPr>
-          <p:cNvPr id="33" name="Text 31"/>
-          <p:cNvSpPr/>
-          <p:nvPr/>
-        </p:nvSpPr>
-        <p:spPr>
-          <a:xfrm>
-            <a:off x="6784848" y="4882896"/>
-            <a:ext cx="4297680" cy="310896"/>
-          </a:xfrm>
-          <a:prstGeom prst="rect">
-            <a:avLst/>
-          </a:prstGeom>
-          <a:noFill/>
-          <a:ln/>
-        </p:spPr>
-        <p:txBody>
-          <a:bodyPr wrap="square" lIns="0" tIns="0" rIns="0" bIns="0" rtlCol="0" anchor="ctr"/>
-          <a:lstStyle/>
-          <a:p>
-            <a:pPr marL="0" indent="0">
-              <a:buNone/>
-            </a:pPr>
-            <a:r>
-              <a:rPr lang="en-US" sz="1250" dirty="0">
-                <a:solidFill>
-                  <a:srgbClr val="C2CDE0"/>
-                </a:solidFill>
-                <a:latin typeface="Calibri" pitchFamily="34" charset="0"/>
-                <a:ea typeface="Calibri" pitchFamily="34" charset="-122"/>
-                <a:cs typeface="Calibri" pitchFamily="34" charset="-120"/>
-              </a:rPr>
-              <a:t>Full audit trail</a:t>
-            </a:r>
-            <a:endParaRPr lang="en-US" sz="1250" dirty="0"/>
-          </a:p>
-        </p:txBody>
-      </p:sp>
-      <p:sp>
-        <p:nvSpPr>
-          <p:cNvPr id="34" name="Text 32"/>
-          <p:cNvSpPr/>
-          <p:nvPr/>
-        </p:nvSpPr>
-        <p:spPr>
-          <a:xfrm>
-            <a:off x="6455664" y="5303520"/>
-            <a:ext cx="320040" cy="310896"/>
-          </a:xfrm>
-          <a:prstGeom prst="rect">
-            <a:avLst/>
-          </a:prstGeom>
-          <a:noFill/>
-          <a:ln/>
-        </p:spPr>
-        <p:txBody>
-          <a:bodyPr wrap="square" lIns="0" tIns="0" rIns="0" bIns="0" rtlCol="0" anchor="ctr"/>
-          <a:lstStyle/>
-          <a:p>
-            <a:pPr marL="0" indent="0">
-              <a:buNone/>
-            </a:pPr>
-            <a:r>
-              <a:rPr lang="en-US" sz="1300" b="1" dirty="0">
-                <a:solidFill>
-                  <a:srgbClr val="35C98A"/>
-                </a:solidFill>
-                <a:latin typeface="Calibri" pitchFamily="34" charset="0"/>
-                <a:ea typeface="Calibri" pitchFamily="34" charset="-122"/>
-                <a:cs typeface="Calibri" pitchFamily="34" charset="-120"/>
-              </a:rPr>
-              <a:t>✓</a:t>
-            </a:r>
-            <a:endParaRPr lang="en-US" sz="1300" dirty="0"/>
-          </a:p>
-        </p:txBody>
-      </p:sp>
-      <p:sp>
-        <p:nvSpPr>
-          <p:cNvPr id="35" name="Text 33"/>
-          <p:cNvSpPr/>
-          <p:nvPr/>
-        </p:nvSpPr>
-        <p:spPr>
-          <a:xfrm>
-            <a:off x="6784848" y="5303520"/>
-            <a:ext cx="4297680" cy="310896"/>
-          </a:xfrm>
-          <a:prstGeom prst="rect">
-            <a:avLst/>
-          </a:prstGeom>
-          <a:noFill/>
-          <a:ln/>
-        </p:spPr>
-        <p:txBody>
-          <a:bodyPr wrap="square" lIns="0" tIns="0" rIns="0" bIns="0" rtlCol="0" anchor="ctr"/>
-          <a:lstStyle/>
-          <a:p>
-            <a:pPr marL="0" indent="0">
-              <a:buNone/>
-            </a:pPr>
-            <a:r>
-              <a:rPr lang="en-US" sz="1250" dirty="0">
-                <a:solidFill>
-                  <a:srgbClr val="C2CDE0"/>
-                </a:solidFill>
-                <a:latin typeface="Calibri" pitchFamily="34" charset="0"/>
-                <a:ea typeface="Calibri" pitchFamily="34" charset="-122"/>
-                <a:cs typeface="Calibri" pitchFamily="34" charset="-120"/>
-              </a:rPr>
-              <a:t>Methodology &amp; disclaimer</a:t>
-            </a:r>
-            <a:endParaRPr lang="en-US" sz="1250" dirty="0"/>
-          </a:p>
-        </p:txBody>
-      </p:sp>
-      <p:sp>
-        <p:nvSpPr>
-          <p:cNvPr id="36" name="Text 34"/>
-          <p:cNvSpPr/>
-          <p:nvPr/>
-        </p:nvSpPr>
-        <p:spPr>
-          <a:xfrm>
-            <a:off x="11430000" y="6355080"/>
-            <a:ext cx="640080" cy="320040"/>
-          </a:xfrm>
-          <a:prstGeom prst="rect">
-            <a:avLst/>
-          </a:prstGeom>
-          <a:noFill/>
-          <a:ln/>
-        </p:spPr>
-        <p:txBody>
-          <a:bodyPr wrap="square" lIns="0" tIns="0" rIns="0" bIns="0" rtlCol="0" anchor="ctr"/>
-          <a:lstStyle/>
-          <a:p>
-            <a:pPr marL="0" indent="0" algn="r">
-              <a:buNone/>
-            </a:pPr>
-            <a:r>
-              <a:rPr lang="en-US" sz="1000" kern="0" spc="100" dirty="0">
-                <a:solidFill>
-                  <a:srgbClr val="6A7795"/>
-                </a:solidFill>
-                <a:latin typeface="Calibri" pitchFamily="34" charset="0"/>
-                <a:ea typeface="Calibri" pitchFamily="34" charset="-122"/>
-                <a:cs typeface="Calibri" pitchFamily="34" charset="-120"/>
-              </a:rPr>
-              <a:t>09</a:t>
             </a:r>
             <a:endParaRPr lang="en-US" sz="1000" dirty="0"/>
           </a:p>
